--- a/intro-en.pptx
+++ b/intro-en.pptx
@@ -892,6 +892,10 @@
             <a:prstDash val="solid"/>
           </a:ln>
         </p:spPr>
+        <p:txBody>
+          <a:bodyPr/>
+          <a:p/>
+        </p:txBody>
       </p:sp>
       <p:sp>
         <p:nvSpPr>
@@ -1001,7 +1005,7 @@
                 <a:ea typeface="Calibri" pitchFamily="34" charset="-122"/>
                 <a:cs typeface="Calibri" pitchFamily="34" charset="-120"/>
               </a:rPr>
-              <a:t>201 Mountains  ·  k-mountain.champrime.kr</a:t>
+              <a:t>158 Mountains  ·  k-mountain.champrime.kr</a:t>
             </a:r>
             <a:endParaRPr lang="en-US" sz="850" dirty="0"/>
           </a:p>
@@ -1143,6 +1147,10 @@
             <a:prstDash val="solid"/>
           </a:ln>
         </p:spPr>
+        <p:txBody>
+          <a:bodyPr/>
+          <a:p/>
+        </p:txBody>
       </p:sp>
       <p:sp>
         <p:nvSpPr>
@@ -1177,7 +1185,7 @@
                 <a:ea typeface="Calibri" pitchFamily="34" charset="-122"/>
                 <a:cs typeface="Calibri" pitchFamily="34" charset="-120"/>
               </a:rPr>
-              <a:t>201</a:t>
+              <a:t>158</a:t>
             </a:r>
             <a:endParaRPr lang="en-US" sz="2600" dirty="0"/>
           </a:p>
@@ -1255,7 +1263,7 @@
                 <a:ea typeface="Calibri" pitchFamily="34" charset="-122"/>
                 <a:cs typeface="Calibri" pitchFamily="34" charset="-120"/>
               </a:rPr>
-              <a:t>25</a:t>
+              <a:t>148</a:t>
             </a:r>
             <a:endParaRPr lang="en-US" sz="2600" dirty="0"/>
           </a:p>
@@ -1294,7 +1302,7 @@
                 <a:ea typeface="Calibri" pitchFamily="34" charset="-122"/>
                 <a:cs typeface="Calibri" pitchFamily="34" charset="-120"/>
               </a:rPr>
-              <a:t>Nat'l Parks</a:t>
+              <a:t>Legends &amp; Lore</a:t>
             </a:r>
             <a:endParaRPr lang="en-US" sz="850" dirty="0"/>
           </a:p>
@@ -1443,6 +1451,10 @@
             <a:prstDash val="solid"/>
           </a:ln>
         </p:spPr>
+        <p:txBody>
+          <a:bodyPr/>
+          <a:p/>
+        </p:txBody>
       </p:sp>
       <p:sp>
         <p:nvSpPr>
@@ -1507,6 +1519,10 @@
             <a:prstDash val="solid"/>
           </a:ln>
         </p:spPr>
+        <p:txBody>
+          <a:bodyPr/>
+          <a:p/>
+        </p:txBody>
       </p:sp>
       <p:sp>
         <p:nvSpPr>
@@ -1619,6 +1635,10 @@
             </a:outerShdw>
           </a:effectLst>
         </p:spPr>
+        <p:txBody>
+          <a:bodyPr/>
+          <a:p/>
+        </p:txBody>
       </p:sp>
       <p:sp>
         <p:nvSpPr>
@@ -1644,6 +1664,10 @@
             <a:prstDash val="solid"/>
           </a:ln>
         </p:spPr>
+        <p:txBody>
+          <a:bodyPr/>
+          <a:p/>
+        </p:txBody>
       </p:sp>
       <p:sp>
         <p:nvSpPr>
@@ -1714,7 +1738,7 @@
                 <a:ea typeface="Calibri" pitchFamily="34" charset="-122"/>
                 <a:cs typeface="Calibri" pitchFamily="34" charset="-120"/>
               </a:rPr>
-              <a:t>201 Mountain Catalog</a:t>
+              <a:t>158 Mountain Catalog</a:t>
             </a:r>
             <a:endParaRPr lang="en-US" sz="1150" dirty="0"/>
           </a:p>
@@ -1770,7 +1794,7 @@
                 <a:ea typeface="Calibri" pitchFamily="34" charset="-122"/>
                 <a:cs typeface="Calibri" pitchFamily="34" charset="-120"/>
               </a:rPr>
-              <a:t>Photos · Difficulty · Best Season</a:t>
+              <a:t>Photos · Legends · Difficulty · Season</a:t>
             </a:r>
             <a:endParaRPr lang="en-US" sz="900" dirty="0"/>
           </a:p>
@@ -1809,6 +1833,10 @@
             </a:outerShdw>
           </a:effectLst>
         </p:spPr>
+        <p:txBody>
+          <a:bodyPr/>
+          <a:p/>
+        </p:txBody>
       </p:sp>
       <p:sp>
         <p:nvSpPr>
@@ -1834,6 +1862,10 @@
             <a:prstDash val="solid"/>
           </a:ln>
         </p:spPr>
+        <p:txBody>
+          <a:bodyPr/>
+          <a:p/>
+        </p:txBody>
       </p:sp>
       <p:sp>
         <p:nvSpPr>
@@ -1999,6 +2031,10 @@
             </a:outerShdw>
           </a:effectLst>
         </p:spPr>
+        <p:txBody>
+          <a:bodyPr/>
+          <a:p/>
+        </p:txBody>
       </p:sp>
       <p:sp>
         <p:nvSpPr>
@@ -2024,6 +2060,10 @@
             <a:prstDash val="solid"/>
           </a:ln>
         </p:spPr>
+        <p:txBody>
+          <a:bodyPr/>
+          <a:p/>
+        </p:txBody>
       </p:sp>
       <p:sp>
         <p:nvSpPr>
@@ -2189,6 +2229,10 @@
             </a:outerShdw>
           </a:effectLst>
         </p:spPr>
+        <p:txBody>
+          <a:bodyPr/>
+          <a:p/>
+        </p:txBody>
       </p:sp>
       <p:sp>
         <p:nvSpPr>
@@ -2214,6 +2258,10 @@
             <a:prstDash val="solid"/>
           </a:ln>
         </p:spPr>
+        <p:txBody>
+          <a:bodyPr/>
+          <a:p/>
+        </p:txBody>
       </p:sp>
       <p:sp>
         <p:nvSpPr>
@@ -2379,6 +2427,10 @@
             </a:outerShdw>
           </a:effectLst>
         </p:spPr>
+        <p:txBody>
+          <a:bodyPr/>
+          <a:p/>
+        </p:txBody>
       </p:sp>
       <p:sp>
         <p:nvSpPr>
@@ -2404,6 +2456,10 @@
             <a:prstDash val="solid"/>
           </a:ln>
         </p:spPr>
+        <p:txBody>
+          <a:bodyPr/>
+          <a:p/>
+        </p:txBody>
       </p:sp>
       <p:sp>
         <p:nvSpPr>
@@ -2569,6 +2625,10 @@
             </a:outerShdw>
           </a:effectLst>
         </p:spPr>
+        <p:txBody>
+          <a:bodyPr/>
+          <a:p/>
+        </p:txBody>
       </p:sp>
       <p:sp>
         <p:nvSpPr>
@@ -2594,6 +2654,10 @@
             <a:prstDash val="solid"/>
           </a:ln>
         </p:spPr>
+        <p:txBody>
+          <a:bodyPr/>
+          <a:p/>
+        </p:txBody>
       </p:sp>
       <p:sp>
         <p:nvSpPr>

--- a/intro-en.pptx
+++ b/intro-en.pptx
@@ -502,7 +502,7 @@
           <a:p>
             <a:r>
               <a:rPr lang="en-US" dirty="0"/>
-              <a:t/>
+              <a:t>Sanmaru intro slide. Figures: 159 mountains, 149 legends, 16 badges.</a:t>
             </a:r>
             <a:endParaRPr lang="en-US" dirty="0"/>
           </a:p>
@@ -854,6 +854,13 @@
 <file path=ppt/slides/slide1.xml><?xml version="1.0" encoding="utf-8"?>
 <p:sld xmlns:a="http://schemas.openxmlformats.org/drawingml/2006/main" xmlns:r="http://schemas.openxmlformats.org/officeDocument/2006/relationships" xmlns:p="http://schemas.openxmlformats.org/presentationml/2006/main">
   <p:cSld name="Slide 1">
+    <p:bg>
+      <p:bgPr>
+        <a:solidFill>
+          <a:srgbClr val="F2F5F0"/>
+        </a:solidFill>
+      </p:bgPr>
+    </p:bg>
     <p:spTree>
       <p:nvGrpSpPr>
         <p:cNvPr id="1" name=""/>
@@ -877,36 +884,56 @@
         <p:spPr>
           <a:xfrm>
             <a:off x="0" y="0"/>
-            <a:ext cx="3840480" cy="5143500"/>
-          </a:xfrm>
-          <a:prstGeom prst="rect">
-            <a:avLst/>
-          </a:prstGeom>
-          <a:solidFill>
-            <a:srgbClr val="2D5A3D"/>
+            <a:ext cx="3657600" cy="5143500"/>
+          </a:xfrm>
+          <a:prstGeom prst="rect">
+            <a:avLst/>
+          </a:prstGeom>
+          <a:solidFill>
+            <a:srgbClr val="0A3D2B"/>
           </a:solidFill>
           <a:ln w="12700">
             <a:solidFill>
-              <a:srgbClr val="2D5A3D"/>
+              <a:srgbClr val="0A3D2B"/>
             </a:solidFill>
             <a:prstDash val="solid"/>
           </a:ln>
         </p:spPr>
-        <p:txBody>
-          <a:bodyPr/>
-          <a:p/>
-        </p:txBody>
-      </p:sp>
-      <p:sp>
-        <p:nvSpPr>
-          <p:cNvPr id="3" name="Text 1"/>
-          <p:cNvSpPr/>
-          <p:nvPr/>
-        </p:nvSpPr>
-        <p:spPr>
-          <a:xfrm>
-            <a:off x="320040" y="274320"/>
-            <a:ext cx="502920" cy="411480"/>
+      </p:sp>
+      <p:pic>
+        <p:nvPicPr>
+          <p:cNvPr id="3" name="Image 0" descr="preencoded.png">    </p:cNvPr>
+          <p:cNvPicPr>
+            <a:picLocks noChangeAspect="1"/>
+          </p:cNvPicPr>
+          <p:nvPr/>
+        </p:nvPicPr>
+        <p:blipFill>
+          <a:blip r:embed="rId1"/>
+          <a:stretch>
+            <a:fillRect/>
+          </a:stretch>
+        </p:blipFill>
+        <p:spPr>
+          <a:xfrm>
+            <a:off x="384048" y="365760"/>
+            <a:ext cx="420624" cy="420624"/>
+          </a:xfrm>
+          <a:prstGeom prst="rect">
+            <a:avLst/>
+          </a:prstGeom>
+        </p:spPr>
+      </p:pic>
+      <p:sp>
+        <p:nvSpPr>
+          <p:cNvPr id="4" name="Text 1"/>
+          <p:cNvSpPr txBox="1"/>
+          <p:nvPr/>
+        </p:nvSpPr>
+        <p:spPr>
+          <a:xfrm>
+            <a:off x="896112" y="301752"/>
+            <a:ext cx="2560320" cy="384048"/>
           </a:xfrm>
           <a:prstGeom prst="rect">
             <a:avLst/>
@@ -918,31 +945,34 @@
           <a:bodyPr wrap="square" lIns="0" tIns="0" rIns="0" bIns="0" rtlCol="0" anchor="ctr"/>
           <a:lstStyle/>
           <a:p>
-            <a:pPr algn="ctr" indent="0" marL="0">
-              <a:buNone/>
-            </a:pPr>
-            <a:r>
-              <a:rPr lang="en-US" sz="2600" dirty="0">
-                <a:solidFill>
-                  <a:srgbClr val="000000"/>
-                </a:solidFill>
-              </a:rPr>
-              <a:t>⛰️</a:t>
-            </a:r>
-            <a:endParaRPr lang="en-US" sz="2600" dirty="0"/>
-          </a:p>
-        </p:txBody>
-      </p:sp>
-      <p:sp>
-        <p:nvSpPr>
-          <p:cNvPr id="4" name="Text 2"/>
-          <p:cNvSpPr/>
-          <p:nvPr/>
-        </p:nvSpPr>
-        <p:spPr>
-          <a:xfrm>
-            <a:off x="868680" y="274320"/>
-            <a:ext cx="2651760" cy="256032"/>
+            <a:pPr indent="0" marL="0">
+              <a:buNone/>
+            </a:pPr>
+            <a:r>
+              <a:rPr lang="en-US" sz="2200" b="1" dirty="0">
+                <a:solidFill>
+                  <a:srgbClr val="FFFFFF"/>
+                </a:solidFill>
+                <a:latin typeface="Calibri" pitchFamily="34" charset="0"/>
+                <a:ea typeface="Calibri" pitchFamily="34" charset="-122"/>
+                <a:cs typeface="Calibri" pitchFamily="34" charset="-120"/>
+              </a:rPr>
+              <a:t>Sanmaru</a:t>
+            </a:r>
+            <a:endParaRPr lang="en-US" sz="2200" dirty="0"/>
+          </a:p>
+        </p:txBody>
+      </p:sp>
+      <p:sp>
+        <p:nvSpPr>
+          <p:cNvPr id="5" name="Text 2"/>
+          <p:cNvSpPr txBox="1"/>
+          <p:nvPr/>
+        </p:nvSpPr>
+        <p:spPr>
+          <a:xfrm>
+            <a:off x="896112" y="667512"/>
+            <a:ext cx="2651760" cy="219456"/>
           </a:xfrm>
           <a:prstGeom prst="rect">
             <a:avLst/>
@@ -954,34 +984,34 @@
           <a:bodyPr wrap="square" lIns="0" tIns="0" rIns="0" bIns="0" rtlCol="0" anchor="ctr"/>
           <a:lstStyle/>
           <a:p>
-            <a:pPr algn="l" indent="0" marL="0">
-              <a:buNone/>
-            </a:pPr>
-            <a:r>
-              <a:rPr lang="en-US" sz="2000" b="1" dirty="0">
-                <a:solidFill>
-                  <a:srgbClr val="FFFFFF"/>
-                </a:solidFill>
-                <a:latin typeface="Calibri" pitchFamily="34" charset="0"/>
-                <a:ea typeface="Calibri" pitchFamily="34" charset="-122"/>
-                <a:cs typeface="Calibri" pitchFamily="34" charset="-120"/>
-              </a:rPr>
-              <a:t>Korean Peaks</a:t>
-            </a:r>
-            <a:endParaRPr lang="en-US" sz="2000" dirty="0"/>
-          </a:p>
-        </p:txBody>
-      </p:sp>
-      <p:sp>
-        <p:nvSpPr>
-          <p:cNvPr id="5" name="Text 3"/>
-          <p:cNvSpPr/>
-          <p:nvPr/>
-        </p:nvSpPr>
-        <p:spPr>
-          <a:xfrm>
-            <a:off x="868680" y="548640"/>
-            <a:ext cx="2651760" cy="182880"/>
+            <a:pPr indent="0" marL="0">
+              <a:buNone/>
+            </a:pPr>
+            <a:r>
+              <a:rPr lang="en-US" sz="850" dirty="0">
+                <a:solidFill>
+                  <a:srgbClr val="C9D8CE"/>
+                </a:solidFill>
+                <a:latin typeface="Calibri" pitchFamily="34" charset="0"/>
+                <a:ea typeface="Calibri" pitchFamily="34" charset="-122"/>
+                <a:cs typeface="Calibri" pitchFamily="34" charset="-120"/>
+              </a:rPr>
+              <a:t>159 Mountains of Korea · k-mountain.champrime.kr</a:t>
+            </a:r>
+            <a:endParaRPr lang="en-US" sz="850" dirty="0"/>
+          </a:p>
+        </p:txBody>
+      </p:sp>
+      <p:sp>
+        <p:nvSpPr>
+          <p:cNvPr id="6" name="Text 3"/>
+          <p:cNvSpPr txBox="1"/>
+          <p:nvPr/>
+        </p:nvSpPr>
+        <p:spPr>
+          <a:xfrm>
+            <a:off x="384048" y="1005840"/>
+            <a:ext cx="3017520" cy="1143000"/>
           </a:xfrm>
           <a:prstGeom prst="rect">
             <a:avLst/>
@@ -990,37 +1020,60 @@
           <a:ln/>
         </p:spPr>
         <p:txBody>
-          <a:bodyPr wrap="square" lIns="0" tIns="0" rIns="0" bIns="0" rtlCol="0" anchor="ctr"/>
-          <a:lstStyle/>
-          <a:p>
-            <a:pPr algn="l" indent="0" marL="0">
-              <a:buNone/>
-            </a:pPr>
-            <a:r>
-              <a:rPr lang="en-US" sz="850" spc="30" kern="0" dirty="0">
-                <a:solidFill>
-                  <a:srgbClr val="A8C8B0"/>
-                </a:solidFill>
-                <a:latin typeface="Calibri" pitchFamily="34" charset="0"/>
-                <a:ea typeface="Calibri" pitchFamily="34" charset="-122"/>
-                <a:cs typeface="Calibri" pitchFamily="34" charset="-120"/>
-              </a:rPr>
-              <a:t>158 Mountains  ·  k-mountain.champrime.kr</a:t>
-            </a:r>
-            <a:endParaRPr lang="en-US" sz="850" dirty="0"/>
-          </a:p>
-        </p:txBody>
-      </p:sp>
-      <p:sp>
-        <p:nvSpPr>
-          <p:cNvPr id="6" name="Text 4"/>
-          <p:cNvSpPr/>
-          <p:nvPr/>
-        </p:nvSpPr>
-        <p:spPr>
-          <a:xfrm>
-            <a:off x="320040" y="960120"/>
-            <a:ext cx="3246120" cy="1005840"/>
+          <a:bodyPr wrap="square" lIns="0" tIns="0" rIns="0" bIns="0" rtlCol="0" anchor="t"/>
+          <a:lstStyle/>
+          <a:p>
+            <a:pPr indent="0" marL="0">
+              <a:lnSpc>
+                <a:spcPct val="105000"/>
+              </a:lnSpc>
+              <a:buNone/>
+            </a:pPr>
+            <a:r>
+              <a:rPr lang="en-US" sz="3200" b="1" dirty="0">
+                <a:solidFill>
+                  <a:srgbClr val="FFFFFF"/>
+                </a:solidFill>
+                <a:latin typeface="Calibri" pitchFamily="34" charset="0"/>
+                <a:ea typeface="Calibri" pitchFamily="34" charset="-122"/>
+                <a:cs typeface="Calibri" pitchFamily="34" charset="-120"/>
+              </a:rPr>
+              <a:t>Stand on Korea's</a:t>
+            </a:r>
+            <a:endParaRPr lang="en-US" sz="3200" dirty="0"/>
+          </a:p>
+          <a:p>
+            <a:pPr indent="0" marL="0">
+              <a:lnSpc>
+                <a:spcPct val="105000"/>
+              </a:lnSpc>
+              <a:buNone/>
+            </a:pPr>
+            <a:r>
+              <a:rPr lang="en-US" sz="3200" b="1" dirty="0">
+                <a:solidFill>
+                  <a:srgbClr val="E7B64B"/>
+                </a:solidFill>
+                <a:latin typeface="Calibri" pitchFamily="34" charset="0"/>
+                <a:ea typeface="Calibri" pitchFamily="34" charset="-122"/>
+                <a:cs typeface="Calibri" pitchFamily="34" charset="-120"/>
+              </a:rPr>
+              <a:t>Famous Summits</a:t>
+            </a:r>
+            <a:endParaRPr lang="en-US" sz="3200" dirty="0"/>
+          </a:p>
+        </p:txBody>
+      </p:sp>
+      <p:sp>
+        <p:nvSpPr>
+          <p:cNvPr id="7" name="Text 4"/>
+          <p:cNvSpPr txBox="1"/>
+          <p:nvPr/>
+        </p:nvSpPr>
+        <p:spPr>
+          <a:xfrm>
+            <a:off x="384048" y="2340864"/>
+            <a:ext cx="2926080" cy="603504"/>
           </a:xfrm>
           <a:prstGeom prst="rect">
             <a:avLst/>
@@ -1032,51 +1085,37 @@
           <a:bodyPr wrap="square" lIns="0" tIns="0" rIns="0" bIns="0" rtlCol="0" anchor="t"/>
           <a:lstStyle/>
           <a:p>
-            <a:pPr algn="l" indent="0" marL="0">
-              <a:buNone/>
-            </a:pPr>
-            <a:r>
-              <a:rPr lang="en-US" sz="2800" b="1" dirty="0">
-                <a:solidFill>
-                  <a:srgbClr val="FFFFFF"/>
-                </a:solidFill>
-                <a:latin typeface="Calibri" pitchFamily="34" charset="0"/>
-                <a:ea typeface="Calibri" pitchFamily="34" charset="-122"/>
-                <a:cs typeface="Calibri" pitchFamily="34" charset="-120"/>
-              </a:rPr>
-              <a:t>Conquer Korea's</a:t>
-            </a:r>
-            <a:endParaRPr lang="en-US" sz="2800" dirty="0"/>
-          </a:p>
-          <a:p>
-            <a:pPr algn="l" indent="0" marL="0">
-              <a:buNone/>
-            </a:pPr>
-            <a:r>
-              <a:rPr lang="en-US" sz="2800" b="1" dirty="0">
-                <a:solidFill>
-                  <a:srgbClr val="D9A441"/>
-                </a:solidFill>
-                <a:latin typeface="Calibri" pitchFamily="34" charset="0"/>
-                <a:ea typeface="Calibri" pitchFamily="34" charset="-122"/>
-                <a:cs typeface="Calibri" pitchFamily="34" charset="-120"/>
-              </a:rPr>
-              <a:t>Famous Mountains</a:t>
-            </a:r>
-            <a:endParaRPr lang="en-US" sz="2800" dirty="0"/>
-          </a:p>
-        </p:txBody>
-      </p:sp>
-      <p:sp>
-        <p:nvSpPr>
-          <p:cNvPr id="7" name="Text 5"/>
-          <p:cNvSpPr/>
-          <p:nvPr/>
-        </p:nvSpPr>
-        <p:spPr>
-          <a:xfrm>
-            <a:off x="320040" y="2057400"/>
-            <a:ext cx="3246120" cy="594360"/>
+            <a:pPr indent="0" marL="0">
+              <a:lnSpc>
+                <a:spcPct val="125000"/>
+              </a:lnSpc>
+              <a:buNone/>
+            </a:pPr>
+            <a:r>
+              <a:rPr lang="en-US" sz="1000" dirty="0">
+                <a:solidFill>
+                  <a:srgbClr val="C9D8CE"/>
+                </a:solidFill>
+                <a:latin typeface="Calibri" pitchFamily="34" charset="0"/>
+                <a:ea typeface="Calibri" pitchFamily="34" charset="-122"/>
+                <a:cs typeface="Calibri" pitchFamily="34" charset="-120"/>
+              </a:rPr>
+              <a:t>From Seoul's granite ridges to Jeju's volcano: check in at the top, collect badges and climb the leaderboard.</a:t>
+            </a:r>
+            <a:endParaRPr lang="en-US" sz="1000" dirty="0"/>
+          </a:p>
+        </p:txBody>
+      </p:sp>
+      <p:sp>
+        <p:nvSpPr>
+          <p:cNvPr id="8" name="Text 5"/>
+          <p:cNvSpPr txBox="1"/>
+          <p:nvPr/>
+        </p:nvSpPr>
+        <p:spPr>
+          <a:xfrm>
+            <a:off x="384048" y="3017520"/>
+            <a:ext cx="975360" cy="475488"/>
           </a:xfrm>
           <a:prstGeom prst="rect">
             <a:avLst/>
@@ -1092,32 +1131,132 @@
               <a:buNone/>
             </a:pPr>
             <a:r>
+              <a:rPr lang="en-US" sz="3000" b="1" dirty="0">
+                <a:solidFill>
+                  <a:srgbClr val="E7B64B"/>
+                </a:solidFill>
+                <a:latin typeface="Calibri" pitchFamily="34" charset="0"/>
+                <a:ea typeface="Calibri" pitchFamily="34" charset="-122"/>
+                <a:cs typeface="Calibri" pitchFamily="34" charset="-120"/>
+              </a:rPr>
+              <a:t>159</a:t>
+            </a:r>
+            <a:endParaRPr lang="en-US" sz="3000" dirty="0"/>
+          </a:p>
+        </p:txBody>
+      </p:sp>
+      <p:sp>
+        <p:nvSpPr>
+          <p:cNvPr id="9" name="Text 6"/>
+          <p:cNvSpPr txBox="1"/>
+          <p:nvPr/>
+        </p:nvSpPr>
+        <p:spPr>
+          <a:xfrm>
+            <a:off x="384048" y="3493008"/>
+            <a:ext cx="975360" cy="237744"/>
+          </a:xfrm>
+          <a:prstGeom prst="rect">
+            <a:avLst/>
+          </a:prstGeom>
+          <a:noFill/>
+          <a:ln/>
+        </p:spPr>
+        <p:txBody>
+          <a:bodyPr wrap="square" lIns="0" tIns="0" rIns="0" bIns="0" rtlCol="0" anchor="ctr"/>
+          <a:lstStyle/>
+          <a:p>
+            <a:pPr algn="l" indent="0" marL="0">
+              <a:buNone/>
+            </a:pPr>
+            <a:r>
               <a:rPr lang="en-US" sz="950" dirty="0">
                 <a:solidFill>
-                  <a:srgbClr val="A8C8B0"/>
-                </a:solidFill>
-                <a:latin typeface="Calibri" pitchFamily="34" charset="0"/>
-                <a:ea typeface="Calibri" pitchFamily="34" charset="-122"/>
-                <a:cs typeface="Calibri" pitchFamily="34" charset="-120"/>
-              </a:rPr>
-              <a:t>From Seoul's granite ridges to Jeju's volcanic summit —</a:t>
+                  <a:srgbClr val="C9D8CE"/>
+                </a:solidFill>
+                <a:latin typeface="Calibri" pitchFamily="34" charset="0"/>
+                <a:ea typeface="Calibri" pitchFamily="34" charset="-122"/>
+                <a:cs typeface="Calibri" pitchFamily="34" charset="-120"/>
+              </a:rPr>
+              <a:t>Mountains</a:t>
             </a:r>
             <a:endParaRPr lang="en-US" sz="950" dirty="0"/>
           </a:p>
+        </p:txBody>
+      </p:sp>
+      <p:sp>
+        <p:nvSpPr>
+          <p:cNvPr id="10" name="Text 7"/>
+          <p:cNvSpPr txBox="1"/>
+          <p:nvPr/>
+        </p:nvSpPr>
+        <p:spPr>
+          <a:xfrm>
+            <a:off x="1359408" y="3017520"/>
+            <a:ext cx="975360" cy="475488"/>
+          </a:xfrm>
+          <a:prstGeom prst="rect">
+            <a:avLst/>
+          </a:prstGeom>
+          <a:noFill/>
+          <a:ln/>
+        </p:spPr>
+        <p:txBody>
+          <a:bodyPr wrap="square" lIns="0" tIns="0" rIns="0" bIns="0" rtlCol="0" anchor="ctr"/>
+          <a:lstStyle/>
           <a:p>
             <a:pPr algn="l" indent="0" marL="0">
               <a:buNone/>
             </a:pPr>
             <a:r>
+              <a:rPr lang="en-US" sz="3000" b="1" dirty="0">
+                <a:solidFill>
+                  <a:srgbClr val="E7B64B"/>
+                </a:solidFill>
+                <a:latin typeface="Calibri" pitchFamily="34" charset="0"/>
+                <a:ea typeface="Calibri" pitchFamily="34" charset="-122"/>
+                <a:cs typeface="Calibri" pitchFamily="34" charset="-120"/>
+              </a:rPr>
+              <a:t>149</a:t>
+            </a:r>
+            <a:endParaRPr lang="en-US" sz="3000" dirty="0"/>
+          </a:p>
+        </p:txBody>
+      </p:sp>
+      <p:sp>
+        <p:nvSpPr>
+          <p:cNvPr id="11" name="Text 8"/>
+          <p:cNvSpPr txBox="1"/>
+          <p:nvPr/>
+        </p:nvSpPr>
+        <p:spPr>
+          <a:xfrm>
+            <a:off x="1359408" y="3493008"/>
+            <a:ext cx="975360" cy="237744"/>
+          </a:xfrm>
+          <a:prstGeom prst="rect">
+            <a:avLst/>
+          </a:prstGeom>
+          <a:noFill/>
+          <a:ln/>
+        </p:spPr>
+        <p:txBody>
+          <a:bodyPr wrap="square" lIns="0" tIns="0" rIns="0" bIns="0" rtlCol="0" anchor="ctr"/>
+          <a:lstStyle/>
+          <a:p>
+            <a:pPr algn="l" indent="0" marL="0">
+              <a:buNone/>
+            </a:pPr>
+            <a:r>
               <a:rPr lang="en-US" sz="950" dirty="0">
                 <a:solidFill>
-                  <a:srgbClr val="A8C8B0"/>
-                </a:solidFill>
-                <a:latin typeface="Calibri" pitchFamily="34" charset="0"/>
-                <a:ea typeface="Calibri" pitchFamily="34" charset="-122"/>
-                <a:cs typeface="Calibri" pitchFamily="34" charset="-120"/>
-              </a:rPr>
-              <a:t>track your climbs, rate every peak, and rise the leaderboard.</a:t>
+                  <a:srgbClr val="C9D8CE"/>
+                </a:solidFill>
+                <a:latin typeface="Calibri" pitchFamily="34" charset="0"/>
+                <a:ea typeface="Calibri" pitchFamily="34" charset="-122"/>
+                <a:cs typeface="Calibri" pitchFamily="34" charset="-120"/>
+              </a:rPr>
+              <a:t>Legends &amp; lore</a:t>
             </a:r>
             <a:endParaRPr lang="en-US" sz="950" dirty="0"/>
           </a:p>
@@ -1125,43 +1264,158 @@
       </p:sp>
       <p:sp>
         <p:nvSpPr>
-          <p:cNvPr id="8" name="Shape 6"/>
+          <p:cNvPr id="12" name="Text 9"/>
+          <p:cNvSpPr txBox="1"/>
+          <p:nvPr/>
+        </p:nvSpPr>
+        <p:spPr>
+          <a:xfrm>
+            <a:off x="2334768" y="3017520"/>
+            <a:ext cx="975360" cy="475488"/>
+          </a:xfrm>
+          <a:prstGeom prst="rect">
+            <a:avLst/>
+          </a:prstGeom>
+          <a:noFill/>
+          <a:ln/>
+        </p:spPr>
+        <p:txBody>
+          <a:bodyPr wrap="square" lIns="0" tIns="0" rIns="0" bIns="0" rtlCol="0" anchor="ctr"/>
+          <a:lstStyle/>
+          <a:p>
+            <a:pPr algn="l" indent="0" marL="0">
+              <a:buNone/>
+            </a:pPr>
+            <a:r>
+              <a:rPr lang="en-US" sz="3000" b="1" dirty="0">
+                <a:solidFill>
+                  <a:srgbClr val="E7B64B"/>
+                </a:solidFill>
+                <a:latin typeface="Calibri" pitchFamily="34" charset="0"/>
+                <a:ea typeface="Calibri" pitchFamily="34" charset="-122"/>
+                <a:cs typeface="Calibri" pitchFamily="34" charset="-120"/>
+              </a:rPr>
+              <a:t>16</a:t>
+            </a:r>
+            <a:endParaRPr lang="en-US" sz="3000" dirty="0"/>
+          </a:p>
+        </p:txBody>
+      </p:sp>
+      <p:sp>
+        <p:nvSpPr>
+          <p:cNvPr id="13" name="Text 10"/>
+          <p:cNvSpPr txBox="1"/>
+          <p:nvPr/>
+        </p:nvSpPr>
+        <p:spPr>
+          <a:xfrm>
+            <a:off x="2334768" y="3493008"/>
+            <a:ext cx="975360" cy="237744"/>
+          </a:xfrm>
+          <a:prstGeom prst="rect">
+            <a:avLst/>
+          </a:prstGeom>
+          <a:noFill/>
+          <a:ln/>
+        </p:spPr>
+        <p:txBody>
+          <a:bodyPr wrap="square" lIns="0" tIns="0" rIns="0" bIns="0" rtlCol="0" anchor="ctr"/>
+          <a:lstStyle/>
+          <a:p>
+            <a:pPr algn="l" indent="0" marL="0">
+              <a:buNone/>
+            </a:pPr>
+            <a:r>
+              <a:rPr lang="en-US" sz="950" dirty="0">
+                <a:solidFill>
+                  <a:srgbClr val="C9D8CE"/>
+                </a:solidFill>
+                <a:latin typeface="Calibri" pitchFamily="34" charset="0"/>
+                <a:ea typeface="Calibri" pitchFamily="34" charset="-122"/>
+                <a:cs typeface="Calibri" pitchFamily="34" charset="-120"/>
+              </a:rPr>
+              <a:t>Badges</a:t>
+            </a:r>
+            <a:endParaRPr lang="en-US" sz="950" dirty="0"/>
+          </a:p>
+        </p:txBody>
+      </p:sp>
+      <p:sp>
+        <p:nvSpPr>
+          <p:cNvPr id="14" name="Text 11"/>
+          <p:cNvSpPr txBox="1"/>
+          <p:nvPr/>
+        </p:nvSpPr>
+        <p:spPr>
+          <a:xfrm>
+            <a:off x="384048" y="3913632"/>
+            <a:ext cx="3017520" cy="219456"/>
+          </a:xfrm>
+          <a:prstGeom prst="rect">
+            <a:avLst/>
+          </a:prstGeom>
+          <a:noFill/>
+          <a:ln/>
+        </p:spPr>
+        <p:txBody>
+          <a:bodyPr wrap="square" lIns="0" tIns="0" rIns="0" bIns="0" rtlCol="0" anchor="ctr"/>
+          <a:lstStyle/>
+          <a:p>
+            <a:pPr indent="0" marL="0">
+              <a:buNone/>
+            </a:pPr>
+            <a:r>
+              <a:rPr lang="en-US" sz="800" dirty="0">
+                <a:solidFill>
+                  <a:srgbClr val="C9D8CE"/>
+                </a:solidFill>
+                <a:latin typeface="Calibri" pitchFamily="34" charset="0"/>
+                <a:ea typeface="Calibri" pitchFamily="34" charset="-122"/>
+                <a:cs typeface="Calibri" pitchFamily="34" charset="-120"/>
+              </a:rPr>
+              <a:t>Android app · Web   |   English · 한국어   |   Free · No ads</a:t>
+            </a:r>
+            <a:endParaRPr lang="en-US" sz="800" dirty="0"/>
+          </a:p>
+        </p:txBody>
+      </p:sp>
+      <p:sp>
+        <p:nvSpPr>
+          <p:cNvPr id="15" name="Shape 12"/>
           <p:cNvSpPr/>
           <p:nvPr/>
         </p:nvSpPr>
         <p:spPr>
           <a:xfrm>
-            <a:off x="320040" y="2743200"/>
-            <a:ext cx="3200400" cy="10973"/>
-          </a:xfrm>
-          <a:prstGeom prst="rect">
-            <a:avLst/>
-          </a:prstGeom>
-          <a:solidFill>
-            <a:srgbClr val="4A7C59"/>
+            <a:off x="384048" y="4224528"/>
+            <a:ext cx="2926080" cy="457200"/>
+          </a:xfrm>
+          <a:prstGeom prst="roundRect">
+            <a:avLst>
+              <a:gd name="adj" fmla="val 24000"/>
+            </a:avLst>
+          </a:prstGeom>
+          <a:solidFill>
+            <a:srgbClr val="E7B64B"/>
           </a:solidFill>
           <a:ln w="12700">
             <a:solidFill>
-              <a:srgbClr val="4A7C59"/>
+              <a:srgbClr val="E7B64B"/>
             </a:solidFill>
             <a:prstDash val="solid"/>
           </a:ln>
         </p:spPr>
-        <p:txBody>
-          <a:bodyPr/>
-          <a:p/>
-        </p:txBody>
-      </p:sp>
-      <p:sp>
-        <p:nvSpPr>
-          <p:cNvPr id="9" name="Text 7"/>
-          <p:cNvSpPr/>
-          <p:nvPr/>
-        </p:nvSpPr>
-        <p:spPr>
-          <a:xfrm>
-            <a:off x="274320" y="2834640"/>
-            <a:ext cx="1005840" cy="402336"/>
+      </p:sp>
+      <p:sp>
+        <p:nvSpPr>
+          <p:cNvPr id="16" name="Text 13"/>
+          <p:cNvSpPr txBox="1"/>
+          <p:nvPr/>
+        </p:nvSpPr>
+        <p:spPr>
+          <a:xfrm>
+            <a:off x="384048" y="4224528"/>
+            <a:ext cx="2926080" cy="457200"/>
           </a:xfrm>
           <a:prstGeom prst="rect">
             <a:avLst/>
@@ -1177,30 +1431,30 @@
               <a:buNone/>
             </a:pPr>
             <a:r>
-              <a:rPr lang="en-US" sz="2600" b="1" dirty="0">
-                <a:solidFill>
-                  <a:srgbClr val="D9A441"/>
-                </a:solidFill>
-                <a:latin typeface="Calibri" pitchFamily="34" charset="0"/>
-                <a:ea typeface="Calibri" pitchFamily="34" charset="-122"/>
-                <a:cs typeface="Calibri" pitchFamily="34" charset="-120"/>
-              </a:rPr>
-              <a:t>158</a:t>
-            </a:r>
-            <a:endParaRPr lang="en-US" sz="2600" dirty="0"/>
-          </a:p>
-        </p:txBody>
-      </p:sp>
-      <p:sp>
-        <p:nvSpPr>
-          <p:cNvPr id="10" name="Text 8"/>
-          <p:cNvSpPr/>
-          <p:nvPr/>
-        </p:nvSpPr>
-        <p:spPr>
-          <a:xfrm>
-            <a:off x="274320" y="3246120"/>
-            <a:ext cx="1005840" cy="182880"/>
+              <a:rPr lang="en-US" sz="1300" b="1" dirty="0">
+                <a:solidFill>
+                  <a:srgbClr val="3A2C08"/>
+                </a:solidFill>
+                <a:latin typeface="Calibri" pitchFamily="34" charset="0"/>
+                <a:ea typeface="Calibri" pitchFamily="34" charset="-122"/>
+                <a:cs typeface="Calibri" pitchFamily="34" charset="-120"/>
+              </a:rPr>
+              <a:t>k-mountain.champrime.kr  →</a:t>
+            </a:r>
+            <a:endParaRPr lang="en-US" sz="1300" dirty="0"/>
+          </a:p>
+        </p:txBody>
+      </p:sp>
+      <p:sp>
+        <p:nvSpPr>
+          <p:cNvPr id="17" name="Text 14"/>
+          <p:cNvSpPr txBox="1"/>
+          <p:nvPr/>
+        </p:nvSpPr>
+        <p:spPr>
+          <a:xfrm>
+            <a:off x="384048" y="4718304"/>
+            <a:ext cx="2926080" cy="201168"/>
           </a:xfrm>
           <a:prstGeom prst="rect">
             <a:avLst/>
@@ -1216,15 +1470,15 @@
               <a:buNone/>
             </a:pPr>
             <a:r>
-              <a:rPr lang="en-US" sz="850" spc="50" kern="0" dirty="0">
-                <a:solidFill>
-                  <a:srgbClr val="A8C8B0"/>
-                </a:solidFill>
-                <a:latin typeface="Calibri" pitchFamily="34" charset="0"/>
-                <a:ea typeface="Calibri" pitchFamily="34" charset="-122"/>
-                <a:cs typeface="Calibri" pitchFamily="34" charset="-120"/>
-              </a:rPr>
-              <a:t>Mountains</a:t>
+              <a:rPr lang="en-US" sz="850" dirty="0">
+                <a:solidFill>
+                  <a:srgbClr val="C9D8CE"/>
+                </a:solidFill>
+                <a:latin typeface="Calibri" pitchFamily="34" charset="0"/>
+                <a:ea typeface="Calibri" pitchFamily="34" charset="-122"/>
+                <a:cs typeface="Calibri" pitchFamily="34" charset="-120"/>
+              </a:rPr>
+              <a:t>Search "Sanmaru" on Google Play</a:t>
             </a:r>
             <a:endParaRPr lang="en-US" sz="850" dirty="0"/>
           </a:p>
@@ -1232,14 +1486,14 @@
       </p:sp>
       <p:sp>
         <p:nvSpPr>
-          <p:cNvPr id="11" name="Text 9"/>
-          <p:cNvSpPr/>
-          <p:nvPr/>
-        </p:nvSpPr>
-        <p:spPr>
-          <a:xfrm>
-            <a:off x="1463040" y="2834640"/>
-            <a:ext cx="1005840" cy="402336"/>
+          <p:cNvPr id="18" name="Text 15"/>
+          <p:cNvSpPr txBox="1"/>
+          <p:nvPr/>
+        </p:nvSpPr>
+        <p:spPr>
+          <a:xfrm>
+            <a:off x="4005072" y="310896"/>
+            <a:ext cx="4572000" cy="420624"/>
           </a:xfrm>
           <a:prstGeom prst="rect">
             <a:avLst/>
@@ -1251,34 +1505,34 @@
           <a:bodyPr wrap="square" lIns="0" tIns="0" rIns="0" bIns="0" rtlCol="0" anchor="ctr"/>
           <a:lstStyle/>
           <a:p>
-            <a:pPr algn="ctr" indent="0" marL="0">
-              <a:buNone/>
-            </a:pPr>
-            <a:r>
-              <a:rPr lang="en-US" sz="2600" b="1" dirty="0">
-                <a:solidFill>
-                  <a:srgbClr val="D9A441"/>
-                </a:solidFill>
-                <a:latin typeface="Calibri" pitchFamily="34" charset="0"/>
-                <a:ea typeface="Calibri" pitchFamily="34" charset="-122"/>
-                <a:cs typeface="Calibri" pitchFamily="34" charset="-120"/>
-              </a:rPr>
-              <a:t>148</a:t>
-            </a:r>
-            <a:endParaRPr lang="en-US" sz="2600" dirty="0"/>
-          </a:p>
-        </p:txBody>
-      </p:sp>
-      <p:sp>
-        <p:nvSpPr>
-          <p:cNvPr id="12" name="Text 10"/>
-          <p:cNvSpPr/>
-          <p:nvPr/>
-        </p:nvSpPr>
-        <p:spPr>
-          <a:xfrm>
-            <a:off x="1463040" y="3246120"/>
-            <a:ext cx="1005840" cy="182880"/>
+            <a:pPr indent="0" marL="0">
+              <a:buNone/>
+            </a:pPr>
+            <a:r>
+              <a:rPr lang="en-US" sz="2200" b="1" dirty="0">
+                <a:solidFill>
+                  <a:srgbClr val="1C2620"/>
+                </a:solidFill>
+                <a:latin typeface="Calibri" pitchFamily="34" charset="0"/>
+                <a:ea typeface="Calibri" pitchFamily="34" charset="-122"/>
+                <a:cs typeface="Calibri" pitchFamily="34" charset="-120"/>
+              </a:rPr>
+              <a:t>What you get</a:t>
+            </a:r>
+            <a:endParaRPr lang="en-US" sz="2200" dirty="0"/>
+          </a:p>
+        </p:txBody>
+      </p:sp>
+      <p:sp>
+        <p:nvSpPr>
+          <p:cNvPr id="19" name="Text 16"/>
+          <p:cNvSpPr txBox="1"/>
+          <p:nvPr/>
+        </p:nvSpPr>
+        <p:spPr>
+          <a:xfrm>
+            <a:off x="4005072" y="731520"/>
+            <a:ext cx="4572000" cy="237744"/>
           </a:xfrm>
           <a:prstGeom prst="rect">
             <a:avLst/>
@@ -1290,395 +1544,117 @@
           <a:bodyPr wrap="square" lIns="0" tIns="0" rIns="0" bIns="0" rtlCol="0" anchor="ctr"/>
           <a:lstStyle/>
           <a:p>
-            <a:pPr algn="ctr" indent="0" marL="0">
-              <a:buNone/>
-            </a:pPr>
-            <a:r>
-              <a:rPr lang="en-US" sz="850" spc="50" kern="0" dirty="0">
-                <a:solidFill>
-                  <a:srgbClr val="A8C8B0"/>
-                </a:solidFill>
-                <a:latin typeface="Calibri" pitchFamily="34" charset="0"/>
-                <a:ea typeface="Calibri" pitchFamily="34" charset="-122"/>
-                <a:cs typeface="Calibri" pitchFamily="34" charset="-120"/>
-              </a:rPr>
-              <a:t>Legends &amp; Lore</a:t>
-            </a:r>
-            <a:endParaRPr lang="en-US" sz="850" dirty="0"/>
-          </a:p>
-        </p:txBody>
-      </p:sp>
-      <p:sp>
-        <p:nvSpPr>
-          <p:cNvPr id="13" name="Text 11"/>
+            <a:pPr indent="0" marL="0">
+              <a:buNone/>
+            </a:pPr>
+            <a:r>
+              <a:rPr lang="en-US" sz="1000" dirty="0">
+                <a:solidFill>
+                  <a:srgbClr val="5D6B62"/>
+                </a:solidFill>
+                <a:latin typeface="Calibri" pitchFamily="34" charset="0"/>
+                <a:ea typeface="Calibri" pitchFamily="34" charset="-122"/>
+                <a:cs typeface="Calibri" pitchFamily="34" charset="-120"/>
+              </a:rPr>
+              <a:t>Six things Sanmaru does for hikers</a:t>
+            </a:r>
+            <a:endParaRPr lang="en-US" sz="1000" dirty="0"/>
+          </a:p>
+        </p:txBody>
+      </p:sp>
+      <p:sp>
+        <p:nvSpPr>
+          <p:cNvPr id="20" name="Shape 17"/>
           <p:cNvSpPr/>
           <p:nvPr/>
         </p:nvSpPr>
         <p:spPr>
           <a:xfrm>
-            <a:off x="2606040" y="2834640"/>
-            <a:ext cx="1005840" cy="402336"/>
-          </a:xfrm>
-          <a:prstGeom prst="rect">
-            <a:avLst/>
-          </a:prstGeom>
-          <a:noFill/>
-          <a:ln/>
-        </p:spPr>
-        <p:txBody>
-          <a:bodyPr wrap="square" lIns="0" tIns="0" rIns="0" bIns="0" rtlCol="0" anchor="ctr"/>
-          <a:lstStyle/>
-          <a:p>
-            <a:pPr algn="ctr" indent="0" marL="0">
-              <a:buNone/>
-            </a:pPr>
-            <a:r>
-              <a:rPr lang="en-US" sz="2200" b="1" dirty="0">
-                <a:solidFill>
-                  <a:srgbClr val="D9A441"/>
-                </a:solidFill>
-                <a:latin typeface="Calibri" pitchFamily="34" charset="0"/>
-                <a:ea typeface="Calibri" pitchFamily="34" charset="-122"/>
-                <a:cs typeface="Calibri" pitchFamily="34" charset="-120"/>
-              </a:rPr>
-              <a:t>1,947m</a:t>
-            </a:r>
-            <a:endParaRPr lang="en-US" sz="2200" dirty="0"/>
-          </a:p>
-        </p:txBody>
-      </p:sp>
-      <p:sp>
-        <p:nvSpPr>
-          <p:cNvPr id="14" name="Text 12"/>
-          <p:cNvSpPr/>
-          <p:nvPr/>
-        </p:nvSpPr>
-        <p:spPr>
-          <a:xfrm>
-            <a:off x="2606040" y="3246120"/>
-            <a:ext cx="1005840" cy="182880"/>
-          </a:xfrm>
-          <a:prstGeom prst="rect">
-            <a:avLst/>
-          </a:prstGeom>
-          <a:noFill/>
-          <a:ln/>
-        </p:spPr>
-        <p:txBody>
-          <a:bodyPr wrap="square" lIns="0" tIns="0" rIns="0" bIns="0" rtlCol="0" anchor="ctr"/>
-          <a:lstStyle/>
-          <a:p>
-            <a:pPr algn="ctr" indent="0" marL="0">
-              <a:buNone/>
-            </a:pPr>
-            <a:r>
-              <a:rPr lang="en-US" sz="850" spc="50" kern="0" dirty="0">
-                <a:solidFill>
-                  <a:srgbClr val="A8C8B0"/>
-                </a:solidFill>
-                <a:latin typeface="Calibri" pitchFamily="34" charset="0"/>
-                <a:ea typeface="Calibri" pitchFamily="34" charset="-122"/>
-                <a:cs typeface="Calibri" pitchFamily="34" charset="-120"/>
-              </a:rPr>
-              <a:t>Highest Peak</a:t>
-            </a:r>
-            <a:endParaRPr lang="en-US" sz="850" dirty="0"/>
-          </a:p>
-        </p:txBody>
-      </p:sp>
-      <p:sp>
-        <p:nvSpPr>
-          <p:cNvPr id="15" name="Text 13"/>
-          <p:cNvSpPr/>
-          <p:nvPr/>
-        </p:nvSpPr>
-        <p:spPr>
-          <a:xfrm>
-            <a:off x="320040" y="3703320"/>
-            <a:ext cx="3246120" cy="201168"/>
-          </a:xfrm>
-          <a:prstGeom prst="rect">
-            <a:avLst/>
-          </a:prstGeom>
-          <a:noFill/>
-          <a:ln/>
-        </p:spPr>
-        <p:txBody>
-          <a:bodyPr wrap="square" lIns="0" tIns="0" rIns="0" bIns="0" rtlCol="0" anchor="ctr"/>
-          <a:lstStyle/>
-          <a:p>
-            <a:pPr algn="l" indent="0" marL="0">
-              <a:buNone/>
-            </a:pPr>
-            <a:r>
-              <a:rPr lang="en-US" sz="850" dirty="0">
-                <a:solidFill>
-                  <a:srgbClr val="A8C8B0"/>
-                </a:solidFill>
-                <a:latin typeface="Calibri" pitchFamily="34" charset="0"/>
-                <a:ea typeface="Calibri" pitchFamily="34" charset="-122"/>
-                <a:cs typeface="Calibri" pitchFamily="34" charset="-120"/>
-              </a:rPr>
-              <a:t>📱 PWA · Offline Ready  |  🌐 English · Korean  |  🔒 Free · No Ads</a:t>
-            </a:r>
-            <a:endParaRPr lang="en-US" sz="850" dirty="0"/>
-          </a:p>
-        </p:txBody>
-      </p:sp>
-      <p:sp>
-        <p:nvSpPr>
-          <p:cNvPr id="16" name="Shape 14"/>
-          <p:cNvSpPr/>
-          <p:nvPr/>
-        </p:nvSpPr>
-        <p:spPr>
-          <a:xfrm>
-            <a:off x="320040" y="4069080"/>
-            <a:ext cx="2743200" cy="438912"/>
+            <a:off x="4005072" y="1133856"/>
+            <a:ext cx="2313432" cy="1133856"/>
           </a:xfrm>
           <a:prstGeom prst="roundRect">
             <a:avLst>
-              <a:gd name="adj" fmla="val 25000"/>
+              <a:gd name="adj" fmla="val 8065"/>
             </a:avLst>
           </a:prstGeom>
           <a:solidFill>
-            <a:srgbClr val="D9A441"/>
+            <a:srgbClr val="FFFFFF"/>
           </a:solidFill>
           <a:ln w="12700">
             <a:solidFill>
-              <a:srgbClr val="D9A441"/>
-            </a:solidFill>
-            <a:prstDash val="solid"/>
-          </a:ln>
-        </p:spPr>
-        <p:txBody>
-          <a:bodyPr/>
-          <a:p/>
-        </p:txBody>
-      </p:sp>
-      <p:sp>
-        <p:nvSpPr>
-          <p:cNvPr id="17" name="Text 15"/>
-          <p:cNvSpPr/>
-          <p:nvPr/>
-        </p:nvSpPr>
-        <p:spPr>
-          <a:xfrm>
-            <a:off x="320040" y="4069080"/>
-            <a:ext cx="2743200" cy="438912"/>
-          </a:xfrm>
-          <a:prstGeom prst="rect">
-            <a:avLst/>
-          </a:prstGeom>
-          <a:noFill/>
-          <a:ln/>
-        </p:spPr>
-        <p:txBody>
-          <a:bodyPr wrap="square" lIns="0" tIns="0" rIns="0" bIns="0" rtlCol="0" anchor="ctr"/>
-          <a:lstStyle/>
-          <a:p>
-            <a:pPr algn="ctr" indent="0" marL="0">
-              <a:buNone/>
-            </a:pPr>
-            <a:r>
-              <a:rPr lang="en-US" sz="1100" b="1" dirty="0">
-                <a:solidFill>
-                  <a:srgbClr val="3A2C08"/>
-                </a:solidFill>
-                <a:latin typeface="Calibri" pitchFamily="34" charset="0"/>
-                <a:ea typeface="Calibri" pitchFamily="34" charset="-122"/>
-                <a:cs typeface="Calibri" pitchFamily="34" charset="-120"/>
-              </a:rPr>
-              <a:t>k-mountain.champrime.kr  →</a:t>
-            </a:r>
-            <a:endParaRPr lang="en-US" sz="1100" dirty="0"/>
-          </a:p>
-        </p:txBody>
-      </p:sp>
-      <p:sp>
-        <p:nvSpPr>
-          <p:cNvPr id="18" name="Shape 16"/>
-          <p:cNvSpPr/>
-          <p:nvPr/>
-        </p:nvSpPr>
-        <p:spPr>
-          <a:xfrm>
-            <a:off x="3840480" y="0"/>
-            <a:ext cx="5303520" cy="5143500"/>
-          </a:xfrm>
-          <a:prstGeom prst="rect">
-            <a:avLst/>
-          </a:prstGeom>
-          <a:solidFill>
-            <a:srgbClr val="EEF3EC"/>
-          </a:solidFill>
-          <a:ln w="12700">
-            <a:solidFill>
-              <a:srgbClr val="EEF3EC"/>
-            </a:solidFill>
-            <a:prstDash val="solid"/>
-          </a:ln>
-        </p:spPr>
-        <p:txBody>
-          <a:bodyPr/>
-          <a:p/>
-        </p:txBody>
-      </p:sp>
-      <p:sp>
-        <p:nvSpPr>
-          <p:cNvPr id="19" name="Text 17"/>
-          <p:cNvSpPr/>
-          <p:nvPr/>
-        </p:nvSpPr>
-        <p:spPr>
-          <a:xfrm>
-            <a:off x="4114800" y="256032"/>
-            <a:ext cx="4663440" cy="347472"/>
-          </a:xfrm>
-          <a:prstGeom prst="rect">
-            <a:avLst/>
-          </a:prstGeom>
-          <a:noFill/>
-          <a:ln/>
-        </p:spPr>
-        <p:txBody>
-          <a:bodyPr wrap="square" lIns="0" tIns="0" rIns="0" bIns="0" rtlCol="0" anchor="ctr"/>
-          <a:lstStyle/>
-          <a:p>
-            <a:pPr algn="l" indent="0" marL="0">
-              <a:buNone/>
-            </a:pPr>
-            <a:r>
-              <a:rPr lang="en-US" sz="1500" b="1" dirty="0">
-                <a:solidFill>
-                  <a:srgbClr val="1C2620"/>
-                </a:solidFill>
-                <a:latin typeface="Calibri" pitchFamily="34" charset="0"/>
-                <a:ea typeface="Calibri" pitchFamily="34" charset="-122"/>
-                <a:cs typeface="Calibri" pitchFamily="34" charset="-120"/>
-              </a:rPr>
-              <a:t>Key Features</a:t>
-            </a:r>
-            <a:endParaRPr lang="en-US" sz="1500" dirty="0"/>
-          </a:p>
-        </p:txBody>
-      </p:sp>
-      <p:sp>
-        <p:nvSpPr>
-          <p:cNvPr id="20" name="Text 18"/>
-          <p:cNvSpPr/>
-          <p:nvPr/>
-        </p:nvSpPr>
-        <p:spPr>
-          <a:xfrm>
-            <a:off x="4114800" y="566928"/>
-            <a:ext cx="4663440" cy="201168"/>
-          </a:xfrm>
-          <a:prstGeom prst="rect">
-            <a:avLst/>
-          </a:prstGeom>
-          <a:noFill/>
-          <a:ln/>
-        </p:spPr>
-        <p:txBody>
-          <a:bodyPr wrap="square" lIns="0" tIns="0" rIns="0" bIns="0" rtlCol="0" anchor="ctr"/>
-          <a:lstStyle/>
-          <a:p>
-            <a:pPr algn="l" indent="0" marL="0">
-              <a:buNone/>
-            </a:pPr>
-            <a:r>
-              <a:rPr lang="en-US" sz="900" dirty="0">
-                <a:solidFill>
-                  <a:srgbClr val="5D6B62"/>
-                </a:solidFill>
-                <a:latin typeface="Calibri" pitchFamily="34" charset="0"/>
-                <a:ea typeface="Calibri" pitchFamily="34" charset="-122"/>
-                <a:cs typeface="Calibri" pitchFamily="34" charset="-120"/>
-              </a:rPr>
-              <a:t>6 reasons hikers love Korean Peaks</a:t>
-            </a:r>
-            <a:endParaRPr lang="en-US" sz="900" dirty="0"/>
-          </a:p>
-        </p:txBody>
-      </p:sp>
-      <p:sp>
-        <p:nvSpPr>
-          <p:cNvPr id="21" name="Shape 19"/>
-          <p:cNvSpPr/>
-          <p:nvPr/>
-        </p:nvSpPr>
-        <p:spPr>
-          <a:xfrm>
-            <a:off x="4069080" y="868680"/>
-            <a:ext cx="2359152" cy="1188720"/>
-          </a:xfrm>
-          <a:prstGeom prst="roundRect">
-            <a:avLst>
-              <a:gd name="adj" fmla="val 9231"/>
-            </a:avLst>
-          </a:prstGeom>
-          <a:solidFill>
-            <a:srgbClr val="FFFFFF"/>
-          </a:solidFill>
-          <a:ln w="12700">
-            <a:solidFill>
-              <a:srgbClr val="C9DEC1"/>
+              <a:srgbClr val="D5E3D8"/>
             </a:solidFill>
             <a:prstDash val="solid"/>
           </a:ln>
           <a:effectLst>
-            <a:outerShdw sx="100000" sy="100000" kx="0" ky="0" algn="bl" rotWithShape="0" blurRad="101600" dist="25400" dir="2700000">
+            <a:outerShdw sx="100000" sy="100000" kx="0" ky="0" algn="bl" rotWithShape="0" blurRad="76200" dist="19050" dir="5400000">
               <a:srgbClr val="000000">
-                <a:alpha val="10000"/>
+                <a:alpha val="8000"/>
               </a:srgbClr>
             </a:outerShdw>
           </a:effectLst>
         </p:spPr>
-        <p:txBody>
-          <a:bodyPr/>
-          <a:p/>
-        </p:txBody>
-      </p:sp>
-      <p:sp>
-        <p:nvSpPr>
-          <p:cNvPr id="22" name="Shape 20"/>
+      </p:sp>
+      <p:sp>
+        <p:nvSpPr>
+          <p:cNvPr id="21" name="Shape 18"/>
           <p:cNvSpPr/>
           <p:nvPr/>
         </p:nvSpPr>
         <p:spPr>
           <a:xfrm>
-            <a:off x="4224528" y="1069848"/>
-            <a:ext cx="438912" cy="438912"/>
+            <a:off x="4151376" y="1371600"/>
+            <a:ext cx="420624" cy="420624"/>
           </a:xfrm>
           <a:prstGeom prst="ellipse">
             <a:avLst/>
           </a:prstGeom>
           <a:solidFill>
-            <a:srgbClr val="EEF3EC"/>
+            <a:srgbClr val="E6F0E8"/>
           </a:solidFill>
           <a:ln w="12700">
             <a:solidFill>
-              <a:srgbClr val="C9DEC1"/>
+              <a:srgbClr val="E6F0E8"/>
             </a:solidFill>
             <a:prstDash val="solid"/>
           </a:ln>
         </p:spPr>
-        <p:txBody>
-          <a:bodyPr/>
-          <a:p/>
-        </p:txBody>
-      </p:sp>
-      <p:sp>
-        <p:nvSpPr>
-          <p:cNvPr id="23" name="Text 21"/>
-          <p:cNvSpPr/>
-          <p:nvPr/>
-        </p:nvSpPr>
-        <p:spPr>
-          <a:xfrm>
-            <a:off x="4224528" y="1069848"/>
-            <a:ext cx="438912" cy="438912"/>
+      </p:sp>
+      <p:pic>
+        <p:nvPicPr>
+          <p:cNvPr id="22" name="Image 1" descr="preencoded.png">    </p:cNvPr>
+          <p:cNvPicPr>
+            <a:picLocks noChangeAspect="1"/>
+          </p:cNvPicPr>
+          <p:nvPr/>
+        </p:nvPicPr>
+        <p:blipFill>
+          <a:blip r:embed="rId2"/>
+          <a:stretch>
+            <a:fillRect/>
+          </a:stretch>
+        </p:blipFill>
+        <p:spPr>
+          <a:xfrm>
+            <a:off x="4251960" y="1472184"/>
+            <a:ext cx="219456" cy="219456"/>
+          </a:xfrm>
+          <a:prstGeom prst="rect">
+            <a:avLst/>
+          </a:prstGeom>
+        </p:spPr>
+      </p:pic>
+      <p:sp>
+        <p:nvSpPr>
+          <p:cNvPr id="23" name="Text 19"/>
+          <p:cNvSpPr txBox="1"/>
+          <p:nvPr/>
+        </p:nvSpPr>
+        <p:spPr>
+          <a:xfrm>
+            <a:off x="4681728" y="1335024"/>
+            <a:ext cx="1527048" cy="310896"/>
           </a:xfrm>
           <a:prstGeom prst="rect">
             <a:avLst/>
@@ -1690,31 +1666,34 @@
           <a:bodyPr wrap="square" lIns="0" tIns="0" rIns="0" bIns="0" rtlCol="0" anchor="ctr"/>
           <a:lstStyle/>
           <a:p>
-            <a:pPr algn="ctr" indent="0" marL="0">
-              <a:buNone/>
-            </a:pPr>
-            <a:r>
-              <a:rPr lang="en-US" sz="1800" dirty="0">
-                <a:solidFill>
-                  <a:srgbClr val="000000"/>
-                </a:solidFill>
-              </a:rPr>
-              <a:t>🗺️</a:t>
-            </a:r>
-            <a:endParaRPr lang="en-US" sz="1800" dirty="0"/>
-          </a:p>
-        </p:txBody>
-      </p:sp>
-      <p:sp>
-        <p:nvSpPr>
-          <p:cNvPr id="24" name="Text 22"/>
-          <p:cNvSpPr/>
-          <p:nvPr/>
-        </p:nvSpPr>
-        <p:spPr>
-          <a:xfrm>
-            <a:off x="4745736" y="1033272"/>
-            <a:ext cx="1600200" cy="292608"/>
+            <a:pPr indent="0" marL="0">
+              <a:buNone/>
+            </a:pPr>
+            <a:r>
+              <a:rPr lang="en-US" sz="1150" b="1" dirty="0">
+                <a:solidFill>
+                  <a:srgbClr val="1C2620"/>
+                </a:solidFill>
+                <a:latin typeface="Calibri" pitchFamily="34" charset="0"/>
+                <a:ea typeface="Calibri" pitchFamily="34" charset="-122"/>
+                <a:cs typeface="Calibri" pitchFamily="34" charset="-120"/>
+              </a:rPr>
+              <a:t>159 mountain guides</a:t>
+            </a:r>
+            <a:endParaRPr lang="en-US" sz="1150" dirty="0"/>
+          </a:p>
+        </p:txBody>
+      </p:sp>
+      <p:sp>
+        <p:nvSpPr>
+          <p:cNvPr id="24" name="Text 20"/>
+          <p:cNvSpPr txBox="1"/>
+          <p:nvPr/>
+        </p:nvSpPr>
+        <p:spPr>
+          <a:xfrm>
+            <a:off x="4681728" y="1682496"/>
+            <a:ext cx="1527048" cy="475488"/>
           </a:xfrm>
           <a:prstGeom prst="rect">
             <a:avLst/>
@@ -1723,97 +1702,64 @@
           <a:ln/>
         </p:spPr>
         <p:txBody>
-          <a:bodyPr wrap="square" lIns="0" tIns="0" rIns="0" bIns="0" rtlCol="0" anchor="ctr"/>
-          <a:lstStyle/>
-          <a:p>
-            <a:pPr algn="l" indent="0" marL="0">
-              <a:buNone/>
-            </a:pPr>
-            <a:r>
-              <a:rPr lang="en-US" sz="1150" b="1" dirty="0">
-                <a:solidFill>
-                  <a:srgbClr val="1C2620"/>
-                </a:solidFill>
-                <a:latin typeface="Calibri" pitchFamily="34" charset="0"/>
-                <a:ea typeface="Calibri" pitchFamily="34" charset="-122"/>
-                <a:cs typeface="Calibri" pitchFamily="34" charset="-120"/>
-              </a:rPr>
-              <a:t>158 Mountain Catalog</a:t>
-            </a:r>
-            <a:endParaRPr lang="en-US" sz="1150" dirty="0"/>
-          </a:p>
-        </p:txBody>
-      </p:sp>
-      <p:sp>
-        <p:nvSpPr>
-          <p:cNvPr id="25" name="Text 23"/>
+          <a:bodyPr wrap="square" lIns="0" tIns="0" rIns="0" bIns="0" rtlCol="0" anchor="t"/>
+          <a:lstStyle/>
+          <a:p>
+            <a:pPr indent="0" marL="0">
+              <a:lnSpc>
+                <a:spcPct val="120000"/>
+              </a:lnSpc>
+              <a:buNone/>
+            </a:pPr>
+            <a:r>
+              <a:rPr lang="en-US" sz="900" dirty="0">
+                <a:solidFill>
+                  <a:srgbClr val="5D6B62"/>
+                </a:solidFill>
+                <a:latin typeface="Calibri" pitchFamily="34" charset="0"/>
+                <a:ea typeface="Calibri" pitchFamily="34" charset="-122"/>
+                <a:cs typeface="Calibri" pitchFamily="34" charset="-120"/>
+              </a:rPr>
+              <a:t>Photos, legends, difficulty</a:t>
+            </a:r>
+            <a:endParaRPr lang="en-US" sz="900" dirty="0"/>
+          </a:p>
+          <a:p>
+            <a:pPr indent="0" marL="0">
+              <a:lnSpc>
+                <a:spcPct val="120000"/>
+              </a:lnSpc>
+              <a:buNone/>
+            </a:pPr>
+            <a:r>
+              <a:rPr lang="en-US" sz="900" dirty="0">
+                <a:solidFill>
+                  <a:srgbClr val="5D6B62"/>
+                </a:solidFill>
+                <a:latin typeface="Calibri" pitchFamily="34" charset="0"/>
+                <a:ea typeface="Calibri" pitchFamily="34" charset="-122"/>
+                <a:cs typeface="Calibri" pitchFamily="34" charset="-120"/>
+              </a:rPr>
+              <a:t>In English and Korean</a:t>
+            </a:r>
+            <a:endParaRPr lang="en-US" sz="900" dirty="0"/>
+          </a:p>
+        </p:txBody>
+      </p:sp>
+      <p:sp>
+        <p:nvSpPr>
+          <p:cNvPr id="25" name="Shape 21"/>
           <p:cNvSpPr/>
           <p:nvPr/>
         </p:nvSpPr>
         <p:spPr>
           <a:xfrm>
-            <a:off x="4745736" y="1344168"/>
-            <a:ext cx="1600200" cy="594360"/>
-          </a:xfrm>
-          <a:prstGeom prst="rect">
-            <a:avLst/>
-          </a:prstGeom>
-          <a:noFill/>
-          <a:ln/>
-        </p:spPr>
-        <p:txBody>
-          <a:bodyPr wrap="square" lIns="0" tIns="0" rIns="0" bIns="0" rtlCol="0" anchor="t"/>
-          <a:lstStyle/>
-          <a:p>
-            <a:pPr algn="l" indent="0" marL="0">
-              <a:buNone/>
-            </a:pPr>
-            <a:r>
-              <a:rPr lang="en-US" sz="900" dirty="0">
-                <a:solidFill>
-                  <a:srgbClr val="5D6B62"/>
-                </a:solidFill>
-                <a:latin typeface="Calibri" pitchFamily="34" charset="0"/>
-                <a:ea typeface="Calibri" pitchFamily="34" charset="-122"/>
-                <a:cs typeface="Calibri" pitchFamily="34" charset="-120"/>
-              </a:rPr>
-              <a:t>Bilingual trail guides (EN/KO)</a:t>
-            </a:r>
-            <a:endParaRPr lang="en-US" sz="900" dirty="0"/>
-          </a:p>
-          <a:p>
-            <a:pPr algn="l" indent="0" marL="0">
-              <a:buNone/>
-            </a:pPr>
-            <a:r>
-              <a:rPr lang="en-US" sz="900" dirty="0">
-                <a:solidFill>
-                  <a:srgbClr val="5D6B62"/>
-                </a:solidFill>
-                <a:latin typeface="Calibri" pitchFamily="34" charset="0"/>
-                <a:ea typeface="Calibri" pitchFamily="34" charset="-122"/>
-                <a:cs typeface="Calibri" pitchFamily="34" charset="-120"/>
-              </a:rPr>
-              <a:t>Photos · Legends · Difficulty · Season</a:t>
-            </a:r>
-            <a:endParaRPr lang="en-US" sz="900" dirty="0"/>
-          </a:p>
-        </p:txBody>
-      </p:sp>
-      <p:sp>
-        <p:nvSpPr>
-          <p:cNvPr id="26" name="Shape 24"/>
-          <p:cNvSpPr/>
-          <p:nvPr/>
-        </p:nvSpPr>
-        <p:spPr>
-          <a:xfrm>
-            <a:off x="6565392" y="868680"/>
-            <a:ext cx="2359152" cy="1188720"/>
+            <a:off x="6483096" y="1133856"/>
+            <a:ext cx="2313432" cy="1133856"/>
           </a:xfrm>
           <a:prstGeom prst="roundRect">
             <a:avLst>
-              <a:gd name="adj" fmla="val 9231"/>
+              <a:gd name="adj" fmla="val 8065"/>
             </a:avLst>
           </a:prstGeom>
           <a:solidFill>
@@ -1821,62 +1767,78 @@
           </a:solidFill>
           <a:ln w="12700">
             <a:solidFill>
-              <a:srgbClr val="C9DEC1"/>
+              <a:srgbClr val="D5E3D8"/>
             </a:solidFill>
             <a:prstDash val="solid"/>
           </a:ln>
           <a:effectLst>
-            <a:outerShdw sx="100000" sy="100000" kx="0" ky="0" algn="bl" rotWithShape="0" blurRad="101600" dist="25400" dir="2700000">
+            <a:outerShdw sx="100000" sy="100000" kx="0" ky="0" algn="bl" rotWithShape="0" blurRad="76200" dist="19050" dir="5400000">
               <a:srgbClr val="000000">
-                <a:alpha val="10000"/>
+                <a:alpha val="8000"/>
               </a:srgbClr>
             </a:outerShdw>
           </a:effectLst>
         </p:spPr>
-        <p:txBody>
-          <a:bodyPr/>
-          <a:p/>
-        </p:txBody>
-      </p:sp>
-      <p:sp>
-        <p:nvSpPr>
-          <p:cNvPr id="27" name="Shape 25"/>
+      </p:sp>
+      <p:sp>
+        <p:nvSpPr>
+          <p:cNvPr id="26" name="Shape 22"/>
           <p:cNvSpPr/>
           <p:nvPr/>
         </p:nvSpPr>
         <p:spPr>
           <a:xfrm>
-            <a:off x="6720840" y="1069848"/>
-            <a:ext cx="438912" cy="438912"/>
+            <a:off x="6629400" y="1371600"/>
+            <a:ext cx="420624" cy="420624"/>
           </a:xfrm>
           <a:prstGeom prst="ellipse">
             <a:avLst/>
           </a:prstGeom>
           <a:solidFill>
-            <a:srgbClr val="EEF3EC"/>
+            <a:srgbClr val="E6F0E8"/>
           </a:solidFill>
           <a:ln w="12700">
             <a:solidFill>
-              <a:srgbClr val="C9DEC1"/>
+              <a:srgbClr val="E6F0E8"/>
             </a:solidFill>
             <a:prstDash val="solid"/>
           </a:ln>
         </p:spPr>
-        <p:txBody>
-          <a:bodyPr/>
-          <a:p/>
-        </p:txBody>
-      </p:sp>
-      <p:sp>
-        <p:nvSpPr>
-          <p:cNvPr id="28" name="Text 26"/>
-          <p:cNvSpPr/>
-          <p:nvPr/>
-        </p:nvSpPr>
-        <p:spPr>
-          <a:xfrm>
-            <a:off x="6720840" y="1069848"/>
-            <a:ext cx="438912" cy="438912"/>
+      </p:sp>
+      <p:pic>
+        <p:nvPicPr>
+          <p:cNvPr id="27" name="Image 2" descr="preencoded.png">    </p:cNvPr>
+          <p:cNvPicPr>
+            <a:picLocks noChangeAspect="1"/>
+          </p:cNvPicPr>
+          <p:nvPr/>
+        </p:nvPicPr>
+        <p:blipFill>
+          <a:blip r:embed="rId3"/>
+          <a:stretch>
+            <a:fillRect/>
+          </a:stretch>
+        </p:blipFill>
+        <p:spPr>
+          <a:xfrm>
+            <a:off x="6729984" y="1472184"/>
+            <a:ext cx="219456" cy="219456"/>
+          </a:xfrm>
+          <a:prstGeom prst="rect">
+            <a:avLst/>
+          </a:prstGeom>
+        </p:spPr>
+      </p:pic>
+      <p:sp>
+        <p:nvSpPr>
+          <p:cNvPr id="28" name="Text 23"/>
+          <p:cNvSpPr txBox="1"/>
+          <p:nvPr/>
+        </p:nvSpPr>
+        <p:spPr>
+          <a:xfrm>
+            <a:off x="7159752" y="1335024"/>
+            <a:ext cx="1527048" cy="310896"/>
           </a:xfrm>
           <a:prstGeom prst="rect">
             <a:avLst/>
@@ -1888,31 +1850,34 @@
           <a:bodyPr wrap="square" lIns="0" tIns="0" rIns="0" bIns="0" rtlCol="0" anchor="ctr"/>
           <a:lstStyle/>
           <a:p>
-            <a:pPr algn="ctr" indent="0" marL="0">
-              <a:buNone/>
-            </a:pPr>
-            <a:r>
-              <a:rPr lang="en-US" sz="1800" dirty="0">
-                <a:solidFill>
-                  <a:srgbClr val="000000"/>
-                </a:solidFill>
-              </a:rPr>
-              <a:t>📍</a:t>
-            </a:r>
-            <a:endParaRPr lang="en-US" sz="1800" dirty="0"/>
-          </a:p>
-        </p:txBody>
-      </p:sp>
-      <p:sp>
-        <p:nvSpPr>
-          <p:cNvPr id="29" name="Text 27"/>
-          <p:cNvSpPr/>
-          <p:nvPr/>
-        </p:nvSpPr>
-        <p:spPr>
-          <a:xfrm>
-            <a:off x="7242048" y="1033272"/>
-            <a:ext cx="1600200" cy="292608"/>
+            <a:pPr indent="0" marL="0">
+              <a:buNone/>
+            </a:pPr>
+            <a:r>
+              <a:rPr lang="en-US" sz="1150" b="1" dirty="0">
+                <a:solidFill>
+                  <a:srgbClr val="1C2620"/>
+                </a:solidFill>
+                <a:latin typeface="Calibri" pitchFamily="34" charset="0"/>
+                <a:ea typeface="Calibri" pitchFamily="34" charset="-122"/>
+                <a:cs typeface="Calibri" pitchFamily="34" charset="-120"/>
+              </a:rPr>
+              <a:t>GPS summit check-in</a:t>
+            </a:r>
+            <a:endParaRPr lang="en-US" sz="1150" dirty="0"/>
+          </a:p>
+        </p:txBody>
+      </p:sp>
+      <p:sp>
+        <p:nvSpPr>
+          <p:cNvPr id="29" name="Text 24"/>
+          <p:cNvSpPr txBox="1"/>
+          <p:nvPr/>
+        </p:nvSpPr>
+        <p:spPr>
+          <a:xfrm>
+            <a:off x="7159752" y="1682496"/>
+            <a:ext cx="1527048" cy="475488"/>
           </a:xfrm>
           <a:prstGeom prst="rect">
             <a:avLst/>
@@ -1921,97 +1886,64 @@
           <a:ln/>
         </p:spPr>
         <p:txBody>
-          <a:bodyPr wrap="square" lIns="0" tIns="0" rIns="0" bIns="0" rtlCol="0" anchor="ctr"/>
-          <a:lstStyle/>
-          <a:p>
-            <a:pPr algn="l" indent="0" marL="0">
-              <a:buNone/>
-            </a:pPr>
-            <a:r>
-              <a:rPr lang="en-US" sz="1150" b="1" dirty="0">
-                <a:solidFill>
-                  <a:srgbClr val="1C2620"/>
-                </a:solidFill>
-                <a:latin typeface="Calibri" pitchFamily="34" charset="0"/>
-                <a:ea typeface="Calibri" pitchFamily="34" charset="-122"/>
-                <a:cs typeface="Calibri" pitchFamily="34" charset="-120"/>
-              </a:rPr>
-              <a:t>GPS Summit Verification</a:t>
-            </a:r>
-            <a:endParaRPr lang="en-US" sz="1150" dirty="0"/>
-          </a:p>
-        </p:txBody>
-      </p:sp>
-      <p:sp>
-        <p:nvSpPr>
-          <p:cNvPr id="30" name="Text 28"/>
+          <a:bodyPr wrap="square" lIns="0" tIns="0" rIns="0" bIns="0" rtlCol="0" anchor="t"/>
+          <a:lstStyle/>
+          <a:p>
+            <a:pPr indent="0" marL="0">
+              <a:lnSpc>
+                <a:spcPct val="120000"/>
+              </a:lnSpc>
+              <a:buNone/>
+            </a:pPr>
+            <a:r>
+              <a:rPr lang="en-US" sz="900" dirty="0">
+                <a:solidFill>
+                  <a:srgbClr val="5D6B62"/>
+                </a:solidFill>
+                <a:latin typeface="Calibri" pitchFamily="34" charset="0"/>
+                <a:ea typeface="Calibri" pitchFamily="34" charset="-122"/>
+                <a:cs typeface="Calibri" pitchFamily="34" charset="-120"/>
+              </a:rPr>
+              <a:t>Verified within 1 km</a:t>
+            </a:r>
+            <a:endParaRPr lang="en-US" sz="900" dirty="0"/>
+          </a:p>
+          <a:p>
+            <a:pPr indent="0" marL="0">
+              <a:lnSpc>
+                <a:spcPct val="120000"/>
+              </a:lnSpc>
+              <a:buNone/>
+            </a:pPr>
+            <a:r>
+              <a:rPr lang="en-US" sz="900" dirty="0">
+                <a:solidFill>
+                  <a:srgbClr val="5D6B62"/>
+                </a:solidFill>
+                <a:latin typeface="Calibri" pitchFamily="34" charset="0"/>
+                <a:ea typeface="Calibri" pitchFamily="34" charset="-122"/>
+                <a:cs typeface="Calibri" pitchFamily="34" charset="-120"/>
+              </a:rPr>
+              <a:t>Save a proof card</a:t>
+            </a:r>
+            <a:endParaRPr lang="en-US" sz="900" dirty="0"/>
+          </a:p>
+        </p:txBody>
+      </p:sp>
+      <p:sp>
+        <p:nvSpPr>
+          <p:cNvPr id="30" name="Shape 25"/>
           <p:cNvSpPr/>
           <p:nvPr/>
         </p:nvSpPr>
         <p:spPr>
           <a:xfrm>
-            <a:off x="7242048" y="1344168"/>
-            <a:ext cx="1600200" cy="594360"/>
-          </a:xfrm>
-          <a:prstGeom prst="rect">
-            <a:avLst/>
-          </a:prstGeom>
-          <a:noFill/>
-          <a:ln/>
-        </p:spPr>
-        <p:txBody>
-          <a:bodyPr wrap="square" lIns="0" tIns="0" rIns="0" bIns="0" rtlCol="0" anchor="t"/>
-          <a:lstStyle/>
-          <a:p>
-            <a:pPr algn="l" indent="0" marL="0">
-              <a:buNone/>
-            </a:pPr>
-            <a:r>
-              <a:rPr lang="en-US" sz="900" dirty="0">
-                <a:solidFill>
-                  <a:srgbClr val="5D6B62"/>
-                </a:solidFill>
-                <a:latin typeface="Calibri" pitchFamily="34" charset="0"/>
-                <a:ea typeface="Calibri" pitchFamily="34" charset="-122"/>
-                <a:cs typeface="Calibri" pitchFamily="34" charset="-120"/>
-              </a:rPr>
-              <a:t>Auto-detect arrival at the peak</a:t>
-            </a:r>
-            <a:endParaRPr lang="en-US" sz="900" dirty="0"/>
-          </a:p>
-          <a:p>
-            <a:pPr algn="l" indent="0" marL="0">
-              <a:buNone/>
-            </a:pPr>
-            <a:r>
-              <a:rPr lang="en-US" sz="900" dirty="0">
-                <a:solidFill>
-                  <a:srgbClr val="5D6B62"/>
-                </a:solidFill>
-                <a:latin typeface="Calibri" pitchFamily="34" charset="0"/>
-                <a:ea typeface="Calibri" pitchFamily="34" charset="-122"/>
-                <a:cs typeface="Calibri" pitchFamily="34" charset="-120"/>
-              </a:rPr>
-              <a:t>Earn points &amp; unlock badges</a:t>
-            </a:r>
-            <a:endParaRPr lang="en-US" sz="900" dirty="0"/>
-          </a:p>
-        </p:txBody>
-      </p:sp>
-      <p:sp>
-        <p:nvSpPr>
-          <p:cNvPr id="31" name="Shape 29"/>
-          <p:cNvSpPr/>
-          <p:nvPr/>
-        </p:nvSpPr>
-        <p:spPr>
-          <a:xfrm>
-            <a:off x="4069080" y="2176272"/>
-            <a:ext cx="2359152" cy="1188720"/>
+            <a:off x="4005072" y="2432304"/>
+            <a:ext cx="2313432" cy="1133856"/>
           </a:xfrm>
           <a:prstGeom prst="roundRect">
             <a:avLst>
-              <a:gd name="adj" fmla="val 9231"/>
+              <a:gd name="adj" fmla="val 8065"/>
             </a:avLst>
           </a:prstGeom>
           <a:solidFill>
@@ -2019,62 +1951,78 @@
           </a:solidFill>
           <a:ln w="12700">
             <a:solidFill>
-              <a:srgbClr val="C9DEC1"/>
+              <a:srgbClr val="D5E3D8"/>
             </a:solidFill>
             <a:prstDash val="solid"/>
           </a:ln>
           <a:effectLst>
-            <a:outerShdw sx="100000" sy="100000" kx="0" ky="0" algn="bl" rotWithShape="0" blurRad="101600" dist="25400" dir="2700000">
+            <a:outerShdw sx="100000" sy="100000" kx="0" ky="0" algn="bl" rotWithShape="0" blurRad="76200" dist="19050" dir="5400000">
               <a:srgbClr val="000000">
-                <a:alpha val="10000"/>
+                <a:alpha val="8000"/>
               </a:srgbClr>
             </a:outerShdw>
           </a:effectLst>
         </p:spPr>
-        <p:txBody>
-          <a:bodyPr/>
-          <a:p/>
-        </p:txBody>
-      </p:sp>
-      <p:sp>
-        <p:nvSpPr>
-          <p:cNvPr id="32" name="Shape 30"/>
+      </p:sp>
+      <p:sp>
+        <p:nvSpPr>
+          <p:cNvPr id="31" name="Shape 26"/>
           <p:cNvSpPr/>
           <p:nvPr/>
         </p:nvSpPr>
         <p:spPr>
           <a:xfrm>
-            <a:off x="4224528" y="2377440"/>
-            <a:ext cx="438912" cy="438912"/>
+            <a:off x="4151376" y="2670048"/>
+            <a:ext cx="420624" cy="420624"/>
           </a:xfrm>
           <a:prstGeom prst="ellipse">
             <a:avLst/>
           </a:prstGeom>
           <a:solidFill>
-            <a:srgbClr val="EEF3EC"/>
+            <a:srgbClr val="E6F0E8"/>
           </a:solidFill>
           <a:ln w="12700">
             <a:solidFill>
-              <a:srgbClr val="C9DEC1"/>
+              <a:srgbClr val="E6F0E8"/>
             </a:solidFill>
             <a:prstDash val="solid"/>
           </a:ln>
         </p:spPr>
-        <p:txBody>
-          <a:bodyPr/>
-          <a:p/>
-        </p:txBody>
-      </p:sp>
-      <p:sp>
-        <p:nvSpPr>
-          <p:cNvPr id="33" name="Text 31"/>
-          <p:cNvSpPr/>
-          <p:nvPr/>
-        </p:nvSpPr>
-        <p:spPr>
-          <a:xfrm>
-            <a:off x="4224528" y="2377440"/>
-            <a:ext cx="438912" cy="438912"/>
+      </p:sp>
+      <p:pic>
+        <p:nvPicPr>
+          <p:cNvPr id="32" name="Image 3" descr="preencoded.png">    </p:cNvPr>
+          <p:cNvPicPr>
+            <a:picLocks noChangeAspect="1"/>
+          </p:cNvPicPr>
+          <p:nvPr/>
+        </p:nvPicPr>
+        <p:blipFill>
+          <a:blip r:embed="rId4"/>
+          <a:stretch>
+            <a:fillRect/>
+          </a:stretch>
+        </p:blipFill>
+        <p:spPr>
+          <a:xfrm>
+            <a:off x="4251960" y="2770632"/>
+            <a:ext cx="219456" cy="219456"/>
+          </a:xfrm>
+          <a:prstGeom prst="rect">
+            <a:avLst/>
+          </a:prstGeom>
+        </p:spPr>
+      </p:pic>
+      <p:sp>
+        <p:nvSpPr>
+          <p:cNvPr id="33" name="Text 27"/>
+          <p:cNvSpPr txBox="1"/>
+          <p:nvPr/>
+        </p:nvSpPr>
+        <p:spPr>
+          <a:xfrm>
+            <a:off x="4681728" y="2633472"/>
+            <a:ext cx="1527048" cy="310896"/>
           </a:xfrm>
           <a:prstGeom prst="rect">
             <a:avLst/>
@@ -2086,31 +2034,34 @@
           <a:bodyPr wrap="square" lIns="0" tIns="0" rIns="0" bIns="0" rtlCol="0" anchor="ctr"/>
           <a:lstStyle/>
           <a:p>
-            <a:pPr algn="ctr" indent="0" marL="0">
-              <a:buNone/>
-            </a:pPr>
-            <a:r>
-              <a:rPr lang="en-US" sz="1800" dirty="0">
-                <a:solidFill>
-                  <a:srgbClr val="000000"/>
-                </a:solidFill>
-              </a:rPr>
-              <a:t>⭐</a:t>
-            </a:r>
-            <a:endParaRPr lang="en-US" sz="1800" dirty="0"/>
-          </a:p>
-        </p:txBody>
-      </p:sp>
-      <p:sp>
-        <p:nvSpPr>
-          <p:cNvPr id="34" name="Text 32"/>
-          <p:cNvSpPr/>
-          <p:nvPr/>
-        </p:nvSpPr>
-        <p:spPr>
-          <a:xfrm>
-            <a:off x="4745736" y="2340864"/>
-            <a:ext cx="1600200" cy="292608"/>
+            <a:pPr indent="0" marL="0">
+              <a:buNone/>
+            </a:pPr>
+            <a:r>
+              <a:rPr lang="en-US" sz="1150" b="1" dirty="0">
+                <a:solidFill>
+                  <a:srgbClr val="1C2620"/>
+                </a:solidFill>
+                <a:latin typeface="Calibri" pitchFamily="34" charset="0"/>
+                <a:ea typeface="Calibri" pitchFamily="34" charset="-122"/>
+                <a:cs typeface="Calibri" pitchFamily="34" charset="-120"/>
+              </a:rPr>
+              <a:t>Collect 16 badges</a:t>
+            </a:r>
+            <a:endParaRPr lang="en-US" sz="1150" dirty="0"/>
+          </a:p>
+        </p:txBody>
+      </p:sp>
+      <p:sp>
+        <p:nvSpPr>
+          <p:cNvPr id="34" name="Text 28"/>
+          <p:cNvSpPr txBox="1"/>
+          <p:nvPr/>
+        </p:nvSpPr>
+        <p:spPr>
+          <a:xfrm>
+            <a:off x="4681728" y="2980944"/>
+            <a:ext cx="1527048" cy="475488"/>
           </a:xfrm>
           <a:prstGeom prst="rect">
             <a:avLst/>
@@ -2119,97 +2070,64 @@
           <a:ln/>
         </p:spPr>
         <p:txBody>
-          <a:bodyPr wrap="square" lIns="0" tIns="0" rIns="0" bIns="0" rtlCol="0" anchor="ctr"/>
-          <a:lstStyle/>
-          <a:p>
-            <a:pPr algn="l" indent="0" marL="0">
-              <a:buNone/>
-            </a:pPr>
-            <a:r>
-              <a:rPr lang="en-US" sz="1150" b="1" dirty="0">
-                <a:solidFill>
-                  <a:srgbClr val="1C2620"/>
-                </a:solidFill>
-                <a:latin typeface="Calibri" pitchFamily="34" charset="0"/>
-                <a:ea typeface="Calibri" pitchFamily="34" charset="-122"/>
-                <a:cs typeface="Calibri" pitchFamily="34" charset="-120"/>
-              </a:rPr>
-              <a:t>Reviews &amp; Ratings</a:t>
-            </a:r>
-            <a:endParaRPr lang="en-US" sz="1150" dirty="0"/>
-          </a:p>
-        </p:txBody>
-      </p:sp>
-      <p:sp>
-        <p:nvSpPr>
-          <p:cNvPr id="35" name="Text 33"/>
+          <a:bodyPr wrap="square" lIns="0" tIns="0" rIns="0" bIns="0" rtlCol="0" anchor="t"/>
+          <a:lstStyle/>
+          <a:p>
+            <a:pPr indent="0" marL="0">
+              <a:lnSpc>
+                <a:spcPct val="120000"/>
+              </a:lnSpc>
+              <a:buNone/>
+            </a:pPr>
+            <a:r>
+              <a:rPr lang="en-US" sz="900" dirty="0">
+                <a:solidFill>
+                  <a:srgbClr val="5D6B62"/>
+                </a:solidFill>
+                <a:latin typeface="Calibri" pitchFamily="34" charset="0"/>
+                <a:ea typeface="Calibri" pitchFamily="34" charset="-122"/>
+                <a:cs typeface="Calibri" pitchFamily="34" charset="-120"/>
+              </a:rPr>
+              <a:t>First climb to 100 peaks</a:t>
+            </a:r>
+            <a:endParaRPr lang="en-US" sz="900" dirty="0"/>
+          </a:p>
+          <a:p>
+            <a:pPr indent="0" marL="0">
+              <a:lnSpc>
+                <a:spcPct val="120000"/>
+              </a:lnSpc>
+              <a:buNone/>
+            </a:pPr>
+            <a:r>
+              <a:rPr lang="en-US" sz="900" dirty="0">
+                <a:solidFill>
+                  <a:srgbClr val="5D6B62"/>
+                </a:solidFill>
+                <a:latin typeface="Calibri" pitchFamily="34" charset="0"/>
+                <a:ea typeface="Calibri" pitchFamily="34" charset="-122"/>
+                <a:cs typeface="Calibri" pitchFamily="34" charset="-120"/>
+              </a:rPr>
+              <a:t>Alerts when you earn one</a:t>
+            </a:r>
+            <a:endParaRPr lang="en-US" sz="900" dirty="0"/>
+          </a:p>
+        </p:txBody>
+      </p:sp>
+      <p:sp>
+        <p:nvSpPr>
+          <p:cNvPr id="35" name="Shape 29"/>
           <p:cNvSpPr/>
           <p:nvPr/>
         </p:nvSpPr>
         <p:spPr>
           <a:xfrm>
-            <a:off x="4745736" y="2651760"/>
-            <a:ext cx="1600200" cy="594360"/>
-          </a:xfrm>
-          <a:prstGeom prst="rect">
-            <a:avLst/>
-          </a:prstGeom>
-          <a:noFill/>
-          <a:ln/>
-        </p:spPr>
-        <p:txBody>
-          <a:bodyPr wrap="square" lIns="0" tIns="0" rIns="0" bIns="0" rtlCol="0" anchor="t"/>
-          <a:lstStyle/>
-          <a:p>
-            <a:pPr algn="l" indent="0" marL="0">
-              <a:buNone/>
-            </a:pPr>
-            <a:r>
-              <a:rPr lang="en-US" sz="900" dirty="0">
-                <a:solidFill>
-                  <a:srgbClr val="5D6B62"/>
-                </a:solidFill>
-                <a:latin typeface="Calibri" pitchFamily="34" charset="0"/>
-                <a:ea typeface="Calibri" pitchFamily="34" charset="-122"/>
-                <a:cs typeface="Calibri" pitchFamily="34" charset="-120"/>
-              </a:rPr>
-              <a:t>Share your climb experience</a:t>
-            </a:r>
-            <a:endParaRPr lang="en-US" sz="900" dirty="0"/>
-          </a:p>
-          <a:p>
-            <a:pPr algn="l" indent="0" marL="0">
-              <a:buNone/>
-            </a:pPr>
-            <a:r>
-              <a:rPr lang="en-US" sz="900" dirty="0">
-                <a:solidFill>
-                  <a:srgbClr val="5D6B62"/>
-                </a:solidFill>
-                <a:latin typeface="Calibri" pitchFamily="34" charset="0"/>
-                <a:ea typeface="Calibri" pitchFamily="34" charset="-122"/>
-                <a:cs typeface="Calibri" pitchFamily="34" charset="-120"/>
-              </a:rPr>
-              <a:t>Help others choose their route</a:t>
-            </a:r>
-            <a:endParaRPr lang="en-US" sz="900" dirty="0"/>
-          </a:p>
-        </p:txBody>
-      </p:sp>
-      <p:sp>
-        <p:nvSpPr>
-          <p:cNvPr id="36" name="Shape 34"/>
-          <p:cNvSpPr/>
-          <p:nvPr/>
-        </p:nvSpPr>
-        <p:spPr>
-          <a:xfrm>
-            <a:off x="6565392" y="2176272"/>
-            <a:ext cx="2359152" cy="1188720"/>
+            <a:off x="6483096" y="2432304"/>
+            <a:ext cx="2313432" cy="1133856"/>
           </a:xfrm>
           <a:prstGeom prst="roundRect">
             <a:avLst>
-              <a:gd name="adj" fmla="val 9231"/>
+              <a:gd name="adj" fmla="val 8065"/>
             </a:avLst>
           </a:prstGeom>
           <a:solidFill>
@@ -2217,62 +2135,78 @@
           </a:solidFill>
           <a:ln w="12700">
             <a:solidFill>
-              <a:srgbClr val="C9DEC1"/>
+              <a:srgbClr val="D5E3D8"/>
             </a:solidFill>
             <a:prstDash val="solid"/>
           </a:ln>
           <a:effectLst>
-            <a:outerShdw sx="100000" sy="100000" kx="0" ky="0" algn="bl" rotWithShape="0" blurRad="101600" dist="25400" dir="2700000">
+            <a:outerShdw sx="100000" sy="100000" kx="0" ky="0" algn="bl" rotWithShape="0" blurRad="76200" dist="19050" dir="5400000">
               <a:srgbClr val="000000">
-                <a:alpha val="10000"/>
+                <a:alpha val="8000"/>
               </a:srgbClr>
             </a:outerShdw>
           </a:effectLst>
         </p:spPr>
-        <p:txBody>
-          <a:bodyPr/>
-          <a:p/>
-        </p:txBody>
-      </p:sp>
-      <p:sp>
-        <p:nvSpPr>
-          <p:cNvPr id="37" name="Shape 35"/>
+      </p:sp>
+      <p:sp>
+        <p:nvSpPr>
+          <p:cNvPr id="36" name="Shape 30"/>
           <p:cNvSpPr/>
           <p:nvPr/>
         </p:nvSpPr>
         <p:spPr>
           <a:xfrm>
-            <a:off x="6720840" y="2377440"/>
-            <a:ext cx="438912" cy="438912"/>
+            <a:off x="6629400" y="2670048"/>
+            <a:ext cx="420624" cy="420624"/>
           </a:xfrm>
           <a:prstGeom prst="ellipse">
             <a:avLst/>
           </a:prstGeom>
           <a:solidFill>
-            <a:srgbClr val="EEF3EC"/>
+            <a:srgbClr val="E6F0E8"/>
           </a:solidFill>
           <a:ln w="12700">
             <a:solidFill>
-              <a:srgbClr val="C9DEC1"/>
+              <a:srgbClr val="E6F0E8"/>
             </a:solidFill>
             <a:prstDash val="solid"/>
           </a:ln>
         </p:spPr>
-        <p:txBody>
-          <a:bodyPr/>
-          <a:p/>
-        </p:txBody>
-      </p:sp>
-      <p:sp>
-        <p:nvSpPr>
-          <p:cNvPr id="38" name="Text 36"/>
-          <p:cNvSpPr/>
-          <p:nvPr/>
-        </p:nvSpPr>
-        <p:spPr>
-          <a:xfrm>
-            <a:off x="6720840" y="2377440"/>
-            <a:ext cx="438912" cy="438912"/>
+      </p:sp>
+      <p:pic>
+        <p:nvPicPr>
+          <p:cNvPr id="37" name="Image 4" descr="preencoded.png">    </p:cNvPr>
+          <p:cNvPicPr>
+            <a:picLocks noChangeAspect="1"/>
+          </p:cNvPicPr>
+          <p:nvPr/>
+        </p:nvPicPr>
+        <p:blipFill>
+          <a:blip r:embed="rId5"/>
+          <a:stretch>
+            <a:fillRect/>
+          </a:stretch>
+        </p:blipFill>
+        <p:spPr>
+          <a:xfrm>
+            <a:off x="6729984" y="2770632"/>
+            <a:ext cx="219456" cy="219456"/>
+          </a:xfrm>
+          <a:prstGeom prst="rect">
+            <a:avLst/>
+          </a:prstGeom>
+        </p:spPr>
+      </p:pic>
+      <p:sp>
+        <p:nvSpPr>
+          <p:cNvPr id="38" name="Text 31"/>
+          <p:cNvSpPr txBox="1"/>
+          <p:nvPr/>
+        </p:nvSpPr>
+        <p:spPr>
+          <a:xfrm>
+            <a:off x="7159752" y="2633472"/>
+            <a:ext cx="1527048" cy="310896"/>
           </a:xfrm>
           <a:prstGeom prst="rect">
             <a:avLst/>
@@ -2284,31 +2218,34 @@
           <a:bodyPr wrap="square" lIns="0" tIns="0" rIns="0" bIns="0" rtlCol="0" anchor="ctr"/>
           <a:lstStyle/>
           <a:p>
-            <a:pPr algn="ctr" indent="0" marL="0">
-              <a:buNone/>
-            </a:pPr>
-            <a:r>
-              <a:rPr lang="en-US" sz="1800" dirty="0">
-                <a:solidFill>
-                  <a:srgbClr val="000000"/>
-                </a:solidFill>
-              </a:rPr>
-              <a:t>🏆</a:t>
-            </a:r>
-            <a:endParaRPr lang="en-US" sz="1800" dirty="0"/>
-          </a:p>
-        </p:txBody>
-      </p:sp>
-      <p:sp>
-        <p:nvSpPr>
-          <p:cNvPr id="39" name="Text 37"/>
-          <p:cNvSpPr/>
-          <p:nvPr/>
-        </p:nvSpPr>
-        <p:spPr>
-          <a:xfrm>
-            <a:off x="7242048" y="2340864"/>
-            <a:ext cx="1600200" cy="292608"/>
+            <a:pPr indent="0" marL="0">
+              <a:buNone/>
+            </a:pPr>
+            <a:r>
+              <a:rPr lang="en-US" sz="1150" b="1" dirty="0">
+                <a:solidFill>
+                  <a:srgbClr val="1C2620"/>
+                </a:solidFill>
+                <a:latin typeface="Calibri" pitchFamily="34" charset="0"/>
+                <a:ea typeface="Calibri" pitchFamily="34" charset="-122"/>
+                <a:cs typeface="Calibri" pitchFamily="34" charset="-120"/>
+              </a:rPr>
+              <a:t>Map &amp; leaderboard</a:t>
+            </a:r>
+            <a:endParaRPr lang="en-US" sz="1150" dirty="0"/>
+          </a:p>
+        </p:txBody>
+      </p:sp>
+      <p:sp>
+        <p:nvSpPr>
+          <p:cNvPr id="39" name="Text 32"/>
+          <p:cNvSpPr txBox="1"/>
+          <p:nvPr/>
+        </p:nvSpPr>
+        <p:spPr>
+          <a:xfrm>
+            <a:off x="7159752" y="2980944"/>
+            <a:ext cx="1527048" cy="475488"/>
           </a:xfrm>
           <a:prstGeom prst="rect">
             <a:avLst/>
@@ -2317,97 +2254,64 @@
           <a:ln/>
         </p:spPr>
         <p:txBody>
-          <a:bodyPr wrap="square" lIns="0" tIns="0" rIns="0" bIns="0" rtlCol="0" anchor="ctr"/>
-          <a:lstStyle/>
-          <a:p>
-            <a:pPr algn="l" indent="0" marL="0">
-              <a:buNone/>
-            </a:pPr>
-            <a:r>
-              <a:rPr lang="en-US" sz="1150" b="1" dirty="0">
-                <a:solidFill>
-                  <a:srgbClr val="1C2620"/>
-                </a:solidFill>
-                <a:latin typeface="Calibri" pitchFamily="34" charset="0"/>
-                <a:ea typeface="Calibri" pitchFamily="34" charset="-122"/>
-                <a:cs typeface="Calibri" pitchFamily="34" charset="-120"/>
-              </a:rPr>
-              <a:t>Leaderboard Ranking</a:t>
-            </a:r>
-            <a:endParaRPr lang="en-US" sz="1150" dirty="0"/>
-          </a:p>
-        </p:txBody>
-      </p:sp>
-      <p:sp>
-        <p:nvSpPr>
-          <p:cNvPr id="40" name="Text 38"/>
+          <a:bodyPr wrap="square" lIns="0" tIns="0" rIns="0" bIns="0" rtlCol="0" anchor="t"/>
+          <a:lstStyle/>
+          <a:p>
+            <a:pPr indent="0" marL="0">
+              <a:lnSpc>
+                <a:spcPct val="120000"/>
+              </a:lnSpc>
+              <a:buNone/>
+            </a:pPr>
+            <a:r>
+              <a:rPr lang="en-US" sz="900" dirty="0">
+                <a:solidFill>
+                  <a:srgbClr val="5D6B62"/>
+                </a:solidFill>
+                <a:latin typeface="Calibri" pitchFamily="34" charset="0"/>
+                <a:ea typeface="Calibri" pitchFamily="34" charset="-122"/>
+                <a:cs typeface="Calibri" pitchFamily="34" charset="-120"/>
+              </a:rPr>
+              <a:t>Peaks fill in on your map</a:t>
+            </a:r>
+            <a:endParaRPr lang="en-US" sz="900" dirty="0"/>
+          </a:p>
+          <a:p>
+            <a:pPr indent="0" marL="0">
+              <a:lnSpc>
+                <a:spcPct val="120000"/>
+              </a:lnSpc>
+              <a:buNone/>
+            </a:pPr>
+            <a:r>
+              <a:rPr lang="en-US" sz="900" dirty="0">
+                <a:solidFill>
+                  <a:srgbClr val="5D6B62"/>
+                </a:solidFill>
+                <a:latin typeface="Calibri" pitchFamily="34" charset="0"/>
+                <a:ea typeface="Calibri" pitchFamily="34" charset="-122"/>
+                <a:cs typeface="Calibri" pitchFamily="34" charset="-120"/>
+              </a:rPr>
+              <a:t>Points by difficulty</a:t>
+            </a:r>
+            <a:endParaRPr lang="en-US" sz="900" dirty="0"/>
+          </a:p>
+        </p:txBody>
+      </p:sp>
+      <p:sp>
+        <p:nvSpPr>
+          <p:cNvPr id="40" name="Shape 33"/>
           <p:cNvSpPr/>
           <p:nvPr/>
         </p:nvSpPr>
         <p:spPr>
           <a:xfrm>
-            <a:off x="7242048" y="2651760"/>
-            <a:ext cx="1600200" cy="594360"/>
-          </a:xfrm>
-          <a:prstGeom prst="rect">
-            <a:avLst/>
-          </a:prstGeom>
-          <a:noFill/>
-          <a:ln/>
-        </p:spPr>
-        <p:txBody>
-          <a:bodyPr wrap="square" lIns="0" tIns="0" rIns="0" bIns="0" rtlCol="0" anchor="t"/>
-          <a:lstStyle/>
-          <a:p>
-            <a:pPr algn="l" indent="0" marL="0">
-              <a:buNone/>
-            </a:pPr>
-            <a:r>
-              <a:rPr lang="en-US" sz="900" dirty="0">
-                <a:solidFill>
-                  <a:srgbClr val="5D6B62"/>
-                </a:solidFill>
-                <a:latin typeface="Calibri" pitchFamily="34" charset="0"/>
-                <a:ea typeface="Calibri" pitchFamily="34" charset="-122"/>
-                <a:cs typeface="Calibri" pitchFamily="34" charset="-120"/>
-              </a:rPr>
-              <a:t>Compete with hikers nationwide</a:t>
-            </a:r>
-            <a:endParaRPr lang="en-US" sz="900" dirty="0"/>
-          </a:p>
-          <a:p>
-            <a:pPr algn="l" indent="0" marL="0">
-              <a:buNone/>
-            </a:pPr>
-            <a:r>
-              <a:rPr lang="en-US" sz="900" dirty="0">
-                <a:solidFill>
-                  <a:srgbClr val="5D6B62"/>
-                </a:solidFill>
-                <a:latin typeface="Calibri" pitchFamily="34" charset="0"/>
-                <a:ea typeface="Calibri" pitchFamily="34" charset="-122"/>
-                <a:cs typeface="Calibri" pitchFamily="34" charset="-120"/>
-              </a:rPr>
-              <a:t>Difficulty-weighted point system</a:t>
-            </a:r>
-            <a:endParaRPr lang="en-US" sz="900" dirty="0"/>
-          </a:p>
-        </p:txBody>
-      </p:sp>
-      <p:sp>
-        <p:nvSpPr>
-          <p:cNvPr id="41" name="Shape 39"/>
-          <p:cNvSpPr/>
-          <p:nvPr/>
-        </p:nvSpPr>
-        <p:spPr>
-          <a:xfrm>
-            <a:off x="4069080" y="3493008"/>
-            <a:ext cx="2359152" cy="1188720"/>
+            <a:off x="4005072" y="3730752"/>
+            <a:ext cx="2313432" cy="1133856"/>
           </a:xfrm>
           <a:prstGeom prst="roundRect">
             <a:avLst>
-              <a:gd name="adj" fmla="val 9231"/>
+              <a:gd name="adj" fmla="val 8065"/>
             </a:avLst>
           </a:prstGeom>
           <a:solidFill>
@@ -2415,62 +2319,78 @@
           </a:solidFill>
           <a:ln w="12700">
             <a:solidFill>
-              <a:srgbClr val="C9DEC1"/>
+              <a:srgbClr val="D5E3D8"/>
             </a:solidFill>
             <a:prstDash val="solid"/>
           </a:ln>
           <a:effectLst>
-            <a:outerShdw sx="100000" sy="100000" kx="0" ky="0" algn="bl" rotWithShape="0" blurRad="101600" dist="25400" dir="2700000">
+            <a:outerShdw sx="100000" sy="100000" kx="0" ky="0" algn="bl" rotWithShape="0" blurRad="76200" dist="19050" dir="5400000">
               <a:srgbClr val="000000">
-                <a:alpha val="10000"/>
+                <a:alpha val="8000"/>
               </a:srgbClr>
             </a:outerShdw>
           </a:effectLst>
         </p:spPr>
-        <p:txBody>
-          <a:bodyPr/>
-          <a:p/>
-        </p:txBody>
-      </p:sp>
-      <p:sp>
-        <p:nvSpPr>
-          <p:cNvPr id="42" name="Shape 40"/>
+      </p:sp>
+      <p:sp>
+        <p:nvSpPr>
+          <p:cNvPr id="41" name="Shape 34"/>
           <p:cNvSpPr/>
           <p:nvPr/>
         </p:nvSpPr>
         <p:spPr>
           <a:xfrm>
-            <a:off x="4224528" y="3694176"/>
-            <a:ext cx="438912" cy="438912"/>
+            <a:off x="4151376" y="3968496"/>
+            <a:ext cx="420624" cy="420624"/>
           </a:xfrm>
           <a:prstGeom prst="ellipse">
             <a:avLst/>
           </a:prstGeom>
           <a:solidFill>
-            <a:srgbClr val="EEF3EC"/>
+            <a:srgbClr val="E6F0E8"/>
           </a:solidFill>
           <a:ln w="12700">
             <a:solidFill>
-              <a:srgbClr val="C9DEC1"/>
+              <a:srgbClr val="E6F0E8"/>
             </a:solidFill>
             <a:prstDash val="solid"/>
           </a:ln>
         </p:spPr>
-        <p:txBody>
-          <a:bodyPr/>
-          <a:p/>
-        </p:txBody>
-      </p:sp>
-      <p:sp>
-        <p:nvSpPr>
-          <p:cNvPr id="43" name="Text 41"/>
-          <p:cNvSpPr/>
-          <p:nvPr/>
-        </p:nvSpPr>
-        <p:spPr>
-          <a:xfrm>
-            <a:off x="4224528" y="3694176"/>
-            <a:ext cx="438912" cy="438912"/>
+      </p:sp>
+      <p:pic>
+        <p:nvPicPr>
+          <p:cNvPr id="42" name="Image 5" descr="preencoded.png">    </p:cNvPr>
+          <p:cNvPicPr>
+            <a:picLocks noChangeAspect="1"/>
+          </p:cNvPicPr>
+          <p:nvPr/>
+        </p:nvPicPr>
+        <p:blipFill>
+          <a:blip r:embed="rId6"/>
+          <a:stretch>
+            <a:fillRect/>
+          </a:stretch>
+        </p:blipFill>
+        <p:spPr>
+          <a:xfrm>
+            <a:off x="4251960" y="4069080"/>
+            <a:ext cx="219456" cy="219456"/>
+          </a:xfrm>
+          <a:prstGeom prst="rect">
+            <a:avLst/>
+          </a:prstGeom>
+        </p:spPr>
+      </p:pic>
+      <p:sp>
+        <p:nvSpPr>
+          <p:cNvPr id="43" name="Text 35"/>
+          <p:cNvSpPr txBox="1"/>
+          <p:nvPr/>
+        </p:nvSpPr>
+        <p:spPr>
+          <a:xfrm>
+            <a:off x="4681728" y="3931920"/>
+            <a:ext cx="1527048" cy="310896"/>
           </a:xfrm>
           <a:prstGeom prst="rect">
             <a:avLst/>
@@ -2482,31 +2402,34 @@
           <a:bodyPr wrap="square" lIns="0" tIns="0" rIns="0" bIns="0" rtlCol="0" anchor="ctr"/>
           <a:lstStyle/>
           <a:p>
-            <a:pPr algn="ctr" indent="0" marL="0">
-              <a:buNone/>
-            </a:pPr>
-            <a:r>
-              <a:rPr lang="en-US" sz="1800" dirty="0">
-                <a:solidFill>
-                  <a:srgbClr val="000000"/>
-                </a:solidFill>
-              </a:rPr>
-              <a:t>👥</a:t>
-            </a:r>
-            <a:endParaRPr lang="en-US" sz="1800" dirty="0"/>
-          </a:p>
-        </p:txBody>
-      </p:sp>
-      <p:sp>
-        <p:nvSpPr>
-          <p:cNvPr id="44" name="Text 42"/>
-          <p:cNvSpPr/>
-          <p:nvPr/>
-        </p:nvSpPr>
-        <p:spPr>
-          <a:xfrm>
-            <a:off x="4745736" y="3657600"/>
-            <a:ext cx="1600200" cy="292608"/>
+            <a:pPr indent="0" marL="0">
+              <a:buNone/>
+            </a:pPr>
+            <a:r>
+              <a:rPr lang="en-US" sz="1150" b="1" dirty="0">
+                <a:solidFill>
+                  <a:srgbClr val="1C2620"/>
+                </a:solidFill>
+                <a:latin typeface="Calibri" pitchFamily="34" charset="0"/>
+                <a:ea typeface="Calibri" pitchFamily="34" charset="-122"/>
+                <a:cs typeface="Calibri" pitchFamily="34" charset="-120"/>
+              </a:rPr>
+              <a:t>Buddies &amp; reviews</a:t>
+            </a:r>
+            <a:endParaRPr lang="en-US" sz="1150" dirty="0"/>
+          </a:p>
+        </p:txBody>
+      </p:sp>
+      <p:sp>
+        <p:nvSpPr>
+          <p:cNvPr id="44" name="Text 36"/>
+          <p:cNvSpPr txBox="1"/>
+          <p:nvPr/>
+        </p:nvSpPr>
+        <p:spPr>
+          <a:xfrm>
+            <a:off x="4681728" y="4279392"/>
+            <a:ext cx="1527048" cy="475488"/>
           </a:xfrm>
           <a:prstGeom prst="rect">
             <a:avLst/>
@@ -2515,97 +2438,64 @@
           <a:ln/>
         </p:spPr>
         <p:txBody>
-          <a:bodyPr wrap="square" lIns="0" tIns="0" rIns="0" bIns="0" rtlCol="0" anchor="ctr"/>
-          <a:lstStyle/>
-          <a:p>
-            <a:pPr algn="l" indent="0" marL="0">
-              <a:buNone/>
-            </a:pPr>
-            <a:r>
-              <a:rPr lang="en-US" sz="1150" b="1" dirty="0">
-                <a:solidFill>
-                  <a:srgbClr val="1C2620"/>
-                </a:solidFill>
-                <a:latin typeface="Calibri" pitchFamily="34" charset="0"/>
-                <a:ea typeface="Calibri" pitchFamily="34" charset="-122"/>
-                <a:cs typeface="Calibri" pitchFamily="34" charset="-120"/>
-              </a:rPr>
-              <a:t>Companion Board</a:t>
-            </a:r>
-            <a:endParaRPr lang="en-US" sz="1150" dirty="0"/>
-          </a:p>
-        </p:txBody>
-      </p:sp>
-      <p:sp>
-        <p:nvSpPr>
-          <p:cNvPr id="45" name="Text 43"/>
+          <a:bodyPr wrap="square" lIns="0" tIns="0" rIns="0" bIns="0" rtlCol="0" anchor="t"/>
+          <a:lstStyle/>
+          <a:p>
+            <a:pPr indent="0" marL="0">
+              <a:lnSpc>
+                <a:spcPct val="120000"/>
+              </a:lnSpc>
+              <a:buNone/>
+            </a:pPr>
+            <a:r>
+              <a:rPr lang="en-US" sz="900" dirty="0">
+                <a:solidFill>
+                  <a:srgbClr val="5D6B62"/>
+                </a:solidFill>
+                <a:latin typeface="Calibri" pitchFamily="34" charset="0"/>
+                <a:ea typeface="Calibri" pitchFamily="34" charset="-122"/>
+                <a:cs typeface="Calibri" pitchFamily="34" charset="-120"/>
+              </a:rPr>
+              <a:t>Find people to hike with</a:t>
+            </a:r>
+            <a:endParaRPr lang="en-US" sz="900" dirty="0"/>
+          </a:p>
+          <a:p>
+            <a:pPr indent="0" marL="0">
+              <a:lnSpc>
+                <a:spcPct val="120000"/>
+              </a:lnSpc>
+              <a:buNone/>
+            </a:pPr>
+            <a:r>
+              <a:rPr lang="en-US" sz="900" dirty="0">
+                <a:solidFill>
+                  <a:srgbClr val="5D6B62"/>
+                </a:solidFill>
+                <a:latin typeface="Calibri" pitchFamily="34" charset="0"/>
+                <a:ea typeface="Calibri" pitchFamily="34" charset="-122"/>
+                <a:cs typeface="Calibri" pitchFamily="34" charset="-120"/>
+              </a:rPr>
+              <a:t>Photos, reviews, YouTube</a:t>
+            </a:r>
+            <a:endParaRPr lang="en-US" sz="900" dirty="0"/>
+          </a:p>
+        </p:txBody>
+      </p:sp>
+      <p:sp>
+        <p:nvSpPr>
+          <p:cNvPr id="45" name="Shape 37"/>
           <p:cNvSpPr/>
           <p:nvPr/>
         </p:nvSpPr>
         <p:spPr>
           <a:xfrm>
-            <a:off x="4745736" y="3968496"/>
-            <a:ext cx="1600200" cy="594360"/>
-          </a:xfrm>
-          <a:prstGeom prst="rect">
-            <a:avLst/>
-          </a:prstGeom>
-          <a:noFill/>
-          <a:ln/>
-        </p:spPr>
-        <p:txBody>
-          <a:bodyPr wrap="square" lIns="0" tIns="0" rIns="0" bIns="0" rtlCol="0" anchor="t"/>
-          <a:lstStyle/>
-          <a:p>
-            <a:pPr algn="l" indent="0" marL="0">
-              <a:buNone/>
-            </a:pPr>
-            <a:r>
-              <a:rPr lang="en-US" sz="900" dirty="0">
-                <a:solidFill>
-                  <a:srgbClr val="5D6B62"/>
-                </a:solidFill>
-                <a:latin typeface="Calibri" pitchFamily="34" charset="0"/>
-                <a:ea typeface="Calibri" pitchFamily="34" charset="-122"/>
-                <a:cs typeface="Calibri" pitchFamily="34" charset="-120"/>
-              </a:rPr>
-              <a:t>Find hiking partners</a:t>
-            </a:r>
-            <a:endParaRPr lang="en-US" sz="900" dirty="0"/>
-          </a:p>
-          <a:p>
-            <a:pPr algn="l" indent="0" marL="0">
-              <a:buNone/>
-            </a:pPr>
-            <a:r>
-              <a:rPr lang="en-US" sz="900" dirty="0">
-                <a:solidFill>
-                  <a:srgbClr val="5D6B62"/>
-                </a:solidFill>
-                <a:latin typeface="Calibri" pitchFamily="34" charset="0"/>
-                <a:ea typeface="Calibri" pitchFamily="34" charset="-122"/>
-                <a:cs typeface="Calibri" pitchFamily="34" charset="-120"/>
-              </a:rPr>
-              <a:t>Match by date, mountain &amp; level</a:t>
-            </a:r>
-            <a:endParaRPr lang="en-US" sz="900" dirty="0"/>
-          </a:p>
-        </p:txBody>
-      </p:sp>
-      <p:sp>
-        <p:nvSpPr>
-          <p:cNvPr id="46" name="Shape 44"/>
-          <p:cNvSpPr/>
-          <p:nvPr/>
-        </p:nvSpPr>
-        <p:spPr>
-          <a:xfrm>
-            <a:off x="6565392" y="3493008"/>
-            <a:ext cx="2359152" cy="1188720"/>
+            <a:off x="6483096" y="3730752"/>
+            <a:ext cx="2313432" cy="1133856"/>
           </a:xfrm>
           <a:prstGeom prst="roundRect">
             <a:avLst>
-              <a:gd name="adj" fmla="val 9231"/>
+              <a:gd name="adj" fmla="val 8065"/>
             </a:avLst>
           </a:prstGeom>
           <a:solidFill>
@@ -2613,62 +2503,78 @@
           </a:solidFill>
           <a:ln w="12700">
             <a:solidFill>
-              <a:srgbClr val="C9DEC1"/>
+              <a:srgbClr val="D5E3D8"/>
             </a:solidFill>
             <a:prstDash val="solid"/>
           </a:ln>
           <a:effectLst>
-            <a:outerShdw sx="100000" sy="100000" kx="0" ky="0" algn="bl" rotWithShape="0" blurRad="101600" dist="25400" dir="2700000">
+            <a:outerShdw sx="100000" sy="100000" kx="0" ky="0" algn="bl" rotWithShape="0" blurRad="76200" dist="19050" dir="5400000">
               <a:srgbClr val="000000">
-                <a:alpha val="10000"/>
+                <a:alpha val="8000"/>
               </a:srgbClr>
             </a:outerShdw>
           </a:effectLst>
         </p:spPr>
-        <p:txBody>
-          <a:bodyPr/>
-          <a:p/>
-        </p:txBody>
-      </p:sp>
-      <p:sp>
-        <p:nvSpPr>
-          <p:cNvPr id="47" name="Shape 45"/>
+      </p:sp>
+      <p:sp>
+        <p:nvSpPr>
+          <p:cNvPr id="46" name="Shape 38"/>
           <p:cNvSpPr/>
           <p:nvPr/>
         </p:nvSpPr>
         <p:spPr>
           <a:xfrm>
-            <a:off x="6720840" y="3694176"/>
-            <a:ext cx="438912" cy="438912"/>
+            <a:off x="6629400" y="3968496"/>
+            <a:ext cx="420624" cy="420624"/>
           </a:xfrm>
           <a:prstGeom prst="ellipse">
             <a:avLst/>
           </a:prstGeom>
           <a:solidFill>
-            <a:srgbClr val="EEF3EC"/>
+            <a:srgbClr val="E6F0E8"/>
           </a:solidFill>
           <a:ln w="12700">
             <a:solidFill>
-              <a:srgbClr val="C9DEC1"/>
+              <a:srgbClr val="E6F0E8"/>
             </a:solidFill>
             <a:prstDash val="solid"/>
           </a:ln>
         </p:spPr>
-        <p:txBody>
-          <a:bodyPr/>
-          <a:p/>
-        </p:txBody>
-      </p:sp>
-      <p:sp>
-        <p:nvSpPr>
-          <p:cNvPr id="48" name="Text 46"/>
-          <p:cNvSpPr/>
-          <p:nvPr/>
-        </p:nvSpPr>
-        <p:spPr>
-          <a:xfrm>
-            <a:off x="6720840" y="3694176"/>
-            <a:ext cx="438912" cy="438912"/>
+      </p:sp>
+      <p:pic>
+        <p:nvPicPr>
+          <p:cNvPr id="47" name="Image 6" descr="preencoded.png">    </p:cNvPr>
+          <p:cNvPicPr>
+            <a:picLocks noChangeAspect="1"/>
+          </p:cNvPicPr>
+          <p:nvPr/>
+        </p:nvPicPr>
+        <p:blipFill>
+          <a:blip r:embed="rId7"/>
+          <a:stretch>
+            <a:fillRect/>
+          </a:stretch>
+        </p:blipFill>
+        <p:spPr>
+          <a:xfrm>
+            <a:off x="6729984" y="4069080"/>
+            <a:ext cx="219456" cy="219456"/>
+          </a:xfrm>
+          <a:prstGeom prst="rect">
+            <a:avLst/>
+          </a:prstGeom>
+        </p:spPr>
+      </p:pic>
+      <p:sp>
+        <p:nvSpPr>
+          <p:cNvPr id="48" name="Text 39"/>
+          <p:cNvSpPr txBox="1"/>
+          <p:nvPr/>
+        </p:nvSpPr>
+        <p:spPr>
+          <a:xfrm>
+            <a:off x="7159752" y="3931920"/>
+            <a:ext cx="1527048" cy="310896"/>
           </a:xfrm>
           <a:prstGeom prst="rect">
             <a:avLst/>
@@ -2680,31 +2586,34 @@
           <a:bodyPr wrap="square" lIns="0" tIns="0" rIns="0" bIns="0" rtlCol="0" anchor="ctr"/>
           <a:lstStyle/>
           <a:p>
-            <a:pPr algn="ctr" indent="0" marL="0">
-              <a:buNone/>
-            </a:pPr>
-            <a:r>
-              <a:rPr lang="en-US" sz="1800" dirty="0">
-                <a:solidFill>
-                  <a:srgbClr val="000000"/>
-                </a:solidFill>
-              </a:rPr>
-              <a:t>📱</a:t>
-            </a:r>
-            <a:endParaRPr lang="en-US" sz="1800" dirty="0"/>
-          </a:p>
-        </p:txBody>
-      </p:sp>
-      <p:sp>
-        <p:nvSpPr>
-          <p:cNvPr id="49" name="Text 47"/>
-          <p:cNvSpPr/>
-          <p:nvPr/>
-        </p:nvSpPr>
-        <p:spPr>
-          <a:xfrm>
-            <a:off x="7242048" y="3657600"/>
-            <a:ext cx="1600200" cy="292608"/>
+            <a:pPr indent="0" marL="0">
+              <a:buNone/>
+            </a:pPr>
+            <a:r>
+              <a:rPr lang="en-US" sz="1150" b="1" dirty="0">
+                <a:solidFill>
+                  <a:srgbClr val="1C2620"/>
+                </a:solidFill>
+                <a:latin typeface="Calibri" pitchFamily="34" charset="0"/>
+                <a:ea typeface="Calibri" pitchFamily="34" charset="-122"/>
+                <a:cs typeface="Calibri" pitchFamily="34" charset="-120"/>
+              </a:rPr>
+              <a:t>Trail safety</a:t>
+            </a:r>
+            <a:endParaRPr lang="en-US" sz="1150" dirty="0"/>
+          </a:p>
+        </p:txBody>
+      </p:sp>
+      <p:sp>
+        <p:nvSpPr>
+          <p:cNvPr id="49" name="Text 40"/>
+          <p:cNvSpPr txBox="1"/>
+          <p:nvPr/>
+        </p:nvSpPr>
+        <p:spPr>
+          <a:xfrm>
+            <a:off x="7159752" y="4279392"/>
+            <a:ext cx="1527048" cy="475488"/>
           </a:xfrm>
           <a:prstGeom prst="rect">
             <a:avLst/>
@@ -2713,49 +2622,13 @@
           <a:ln/>
         </p:spPr>
         <p:txBody>
-          <a:bodyPr wrap="square" lIns="0" tIns="0" rIns="0" bIns="0" rtlCol="0" anchor="ctr"/>
-          <a:lstStyle/>
-          <a:p>
-            <a:pPr algn="l" indent="0" marL="0">
-              <a:buNone/>
-            </a:pPr>
-            <a:r>
-              <a:rPr lang="en-US" sz="1150" b="1" dirty="0">
-                <a:solidFill>
-                  <a:srgbClr val="1C2620"/>
-                </a:solidFill>
-                <a:latin typeface="Calibri" pitchFamily="34" charset="0"/>
-                <a:ea typeface="Calibri" pitchFamily="34" charset="-122"/>
-                <a:cs typeface="Calibri" pitchFamily="34" charset="-120"/>
-              </a:rPr>
-              <a:t>PWA · Offline Support</a:t>
-            </a:r>
-            <a:endParaRPr lang="en-US" sz="1150" dirty="0"/>
-          </a:p>
-        </p:txBody>
-      </p:sp>
-      <p:sp>
-        <p:nvSpPr>
-          <p:cNvPr id="50" name="Text 48"/>
-          <p:cNvSpPr/>
-          <p:nvPr/>
-        </p:nvSpPr>
-        <p:spPr>
-          <a:xfrm>
-            <a:off x="7242048" y="3968496"/>
-            <a:ext cx="1600200" cy="594360"/>
-          </a:xfrm>
-          <a:prstGeom prst="rect">
-            <a:avLst/>
-          </a:prstGeom>
-          <a:noFill/>
-          <a:ln/>
-        </p:spPr>
-        <p:txBody>
           <a:bodyPr wrap="square" lIns="0" tIns="0" rIns="0" bIns="0" rtlCol="0" anchor="t"/>
           <a:lstStyle/>
           <a:p>
-            <a:pPr algn="l" indent="0" marL="0">
+            <a:pPr indent="0" marL="0">
+              <a:lnSpc>
+                <a:spcPct val="120000"/>
+              </a:lnSpc>
               <a:buNone/>
             </a:pPr>
             <a:r>
@@ -2767,12 +2640,15 @@
                 <a:ea typeface="Calibri" pitchFamily="34" charset="-122"/>
                 <a:cs typeface="Calibri" pitchFamily="34" charset="-120"/>
               </a:rPr>
-              <a:t>No app install needed</a:t>
+              <a:t>Summit weather, SOS</a:t>
             </a:r>
             <a:endParaRPr lang="en-US" sz="900" dirty="0"/>
           </a:p>
           <a:p>
-            <a:pPr algn="l" indent="0" marL="0">
+            <a:pPr indent="0" marL="0">
+              <a:lnSpc>
+                <a:spcPct val="120000"/>
+              </a:lnSpc>
               <a:buNone/>
             </a:pPr>
             <a:r>
@@ -2784,7 +2660,7 @@
                 <a:ea typeface="Calibri" pitchFamily="34" charset="-122"/>
                 <a:cs typeface="Calibri" pitchFamily="34" charset="-120"/>
               </a:rPr>
-              <a:t>Add to home screen · Works offline</a:t>
+              <a:t>Long trails, food nearby</a:t>
             </a:r>
             <a:endParaRPr lang="en-US" sz="900" dirty="0"/>
           </a:p>
